--- a/Final Presentation.pptx
+++ b/Final Presentation.pptx
@@ -22,24 +22,25 @@
     <p:sldId id="270" r:id="rId16"/>
     <p:sldId id="271" r:id="rId17"/>
     <p:sldId id="272" r:id="rId18"/>
-    <p:sldId id="273" r:id="rId19"/>
-    <p:sldId id="274" r:id="rId20"/>
-    <p:sldId id="275" r:id="rId21"/>
+    <p:sldId id="277" r:id="rId19"/>
+    <p:sldId id="273" r:id="rId20"/>
+    <p:sldId id="274" r:id="rId21"/>
+    <p:sldId id="275" r:id="rId22"/>
   </p:sldIdLst>
   <p:sldSz cx="18288000" cy="10287000"/>
   <p:notesSz cx="6858000" cy="9144000"/>
   <p:embeddedFontLst>
     <p:embeddedFont>
       <p:font typeface="Clear Sans" panose="020B0604020202020204" charset="0"/>
-      <p:regular r:id="rId22"/>
+      <p:regular r:id="rId23"/>
     </p:embeddedFont>
     <p:embeddedFont>
       <p:font typeface="Clear Sans Bold" panose="020B0604020202020204" charset="0"/>
-      <p:regular r:id="rId23"/>
+      <p:regular r:id="rId24"/>
     </p:embeddedFont>
     <p:embeddedFont>
       <p:font typeface="Impact" panose="020B0806030902050204" pitchFamily="34" charset="0"/>
-      <p:regular r:id="rId24"/>
+      <p:regular r:id="rId25"/>
     </p:embeddedFont>
   </p:embeddedFontLst>
   <p:defaultTextStyle>
@@ -336,7 +337,7 @@
             <a:fld id="{1D8BD707-D9CF-40AE-B4C6-C98DA3205C09}" type="datetimeFigureOut">
               <a:rPr lang="en-US" smtClean="0"/>
               <a:pPr/>
-              <a:t>5/22/2025</a:t>
+              <a:t>5/27/2025</a:t>
             </a:fld>
             <a:endParaRPr lang="en-US"/>
           </a:p>
@@ -501,7 +502,7 @@
             <a:fld id="{1D8BD707-D9CF-40AE-B4C6-C98DA3205C09}" type="datetimeFigureOut">
               <a:rPr lang="en-US" smtClean="0"/>
               <a:pPr/>
-              <a:t>5/22/2025</a:t>
+              <a:t>5/27/2025</a:t>
             </a:fld>
             <a:endParaRPr lang="en-US"/>
           </a:p>
@@ -676,7 +677,7 @@
             <a:fld id="{1D8BD707-D9CF-40AE-B4C6-C98DA3205C09}" type="datetimeFigureOut">
               <a:rPr lang="en-US" smtClean="0"/>
               <a:pPr/>
-              <a:t>5/22/2025</a:t>
+              <a:t>5/27/2025</a:t>
             </a:fld>
             <a:endParaRPr lang="en-US"/>
           </a:p>
@@ -841,7 +842,7 @@
             <a:fld id="{1D8BD707-D9CF-40AE-B4C6-C98DA3205C09}" type="datetimeFigureOut">
               <a:rPr lang="en-US" smtClean="0"/>
               <a:pPr/>
-              <a:t>5/22/2025</a:t>
+              <a:t>5/27/2025</a:t>
             </a:fld>
             <a:endParaRPr lang="en-US"/>
           </a:p>
@@ -1083,7 +1084,7 @@
             <a:fld id="{1D8BD707-D9CF-40AE-B4C6-C98DA3205C09}" type="datetimeFigureOut">
               <a:rPr lang="en-US" smtClean="0"/>
               <a:pPr/>
-              <a:t>5/22/2025</a:t>
+              <a:t>5/27/2025</a:t>
             </a:fld>
             <a:endParaRPr lang="en-US"/>
           </a:p>
@@ -1365,7 +1366,7 @@
             <a:fld id="{1D8BD707-D9CF-40AE-B4C6-C98DA3205C09}" type="datetimeFigureOut">
               <a:rPr lang="en-US" smtClean="0"/>
               <a:pPr/>
-              <a:t>5/22/2025</a:t>
+              <a:t>5/27/2025</a:t>
             </a:fld>
             <a:endParaRPr lang="en-US"/>
           </a:p>
@@ -1781,7 +1782,7 @@
             <a:fld id="{1D8BD707-D9CF-40AE-B4C6-C98DA3205C09}" type="datetimeFigureOut">
               <a:rPr lang="en-US" smtClean="0"/>
               <a:pPr/>
-              <a:t>5/22/2025</a:t>
+              <a:t>5/27/2025</a:t>
             </a:fld>
             <a:endParaRPr lang="en-US"/>
           </a:p>
@@ -1895,7 +1896,7 @@
             <a:fld id="{1D8BD707-D9CF-40AE-B4C6-C98DA3205C09}" type="datetimeFigureOut">
               <a:rPr lang="en-US" smtClean="0"/>
               <a:pPr/>
-              <a:t>5/22/2025</a:t>
+              <a:t>5/27/2025</a:t>
             </a:fld>
             <a:endParaRPr lang="en-US"/>
           </a:p>
@@ -1987,7 +1988,7 @@
             <a:fld id="{1D8BD707-D9CF-40AE-B4C6-C98DA3205C09}" type="datetimeFigureOut">
               <a:rPr lang="en-US" smtClean="0"/>
               <a:pPr/>
-              <a:t>5/22/2025</a:t>
+              <a:t>5/27/2025</a:t>
             </a:fld>
             <a:endParaRPr lang="en-US"/>
           </a:p>
@@ -2259,7 +2260,7 @@
             <a:fld id="{1D8BD707-D9CF-40AE-B4C6-C98DA3205C09}" type="datetimeFigureOut">
               <a:rPr lang="en-US" smtClean="0"/>
               <a:pPr/>
-              <a:t>5/22/2025</a:t>
+              <a:t>5/27/2025</a:t>
             </a:fld>
             <a:endParaRPr lang="en-US"/>
           </a:p>
@@ -2508,7 +2509,7 @@
             <a:fld id="{1D8BD707-D9CF-40AE-B4C6-C98DA3205C09}" type="datetimeFigureOut">
               <a:rPr lang="en-US" smtClean="0"/>
               <a:pPr/>
-              <a:t>5/22/2025</a:t>
+              <a:t>5/27/2025</a:t>
             </a:fld>
             <a:endParaRPr lang="en-US"/>
           </a:p>
@@ -2716,7 +2717,7 @@
             <a:fld id="{1D8BD707-D9CF-40AE-B4C6-C98DA3205C09}" type="datetimeFigureOut">
               <a:rPr lang="en-US" smtClean="0"/>
               <a:pPr/>
-              <a:t>5/22/2025</a:t>
+              <a:t>5/27/2025</a:t>
             </a:fld>
             <a:endParaRPr lang="en-US"/>
           </a:p>
@@ -4186,7 +4187,7 @@
         <p:spPr>
           <a:xfrm>
             <a:off x="4946415" y="5949193"/>
-            <a:ext cx="7807739" cy="2824644"/>
+            <a:ext cx="7807739" cy="2051844"/>
           </a:xfrm>
           <a:prstGeom prst="rect">
             <a:avLst/>
@@ -4272,45 +4273,7 @@
                 <a:cs typeface="Clear Sans"/>
                 <a:sym typeface="Clear Sans"/>
               </a:rPr>
-              <a:t>Abhigyan Tomar </a:t>
-            </a:r>
-          </a:p>
-          <a:p>
-            <a:pPr algn="ctr">
-              <a:lnSpc>
-                <a:spcPts val="3206"/>
-              </a:lnSpc>
-            </a:pPr>
-            <a:r>
-              <a:rPr lang="en-US" sz="3206" dirty="0">
-                <a:solidFill>
-                  <a:srgbClr val="262F43"/>
-                </a:solidFill>
-                <a:latin typeface="Clear Sans"/>
-                <a:ea typeface="Clear Sans"/>
-                <a:cs typeface="Clear Sans"/>
-                <a:sym typeface="Clear Sans"/>
-              </a:rPr>
               <a:t>Ms. Nishu Gupta</a:t>
-            </a:r>
-          </a:p>
-          <a:p>
-            <a:pPr algn="ctr">
-              <a:lnSpc>
-                <a:spcPts val="3206"/>
-              </a:lnSpc>
-            </a:pPr>
-            <a:r>
-              <a:rPr lang="en-US" sz="3206" dirty="0">
-                <a:solidFill>
-                  <a:srgbClr val="262F43"/>
-                </a:solidFill>
-                <a:latin typeface="Clear Sans"/>
-                <a:ea typeface="Clear Sans"/>
-                <a:cs typeface="Clear Sans"/>
-                <a:sym typeface="Clear Sans"/>
-              </a:rPr>
-              <a:t>Dr. Jitendra Kumar Seth</a:t>
             </a:r>
           </a:p>
           <a:p>
@@ -6397,7 +6360,7 @@
               </a:lnSpc>
             </a:pPr>
             <a:r>
-              <a:rPr lang="en-US" sz="13222">
+              <a:rPr lang="en-US" sz="13222" dirty="0">
                 <a:solidFill>
                   <a:srgbClr val="262F43"/>
                 </a:solidFill>
@@ -6438,7 +6401,7 @@
               </a:lnSpc>
             </a:pPr>
             <a:r>
-              <a:rPr lang="en-US" sz="3106">
+              <a:rPr lang="en-US" sz="3106" dirty="0">
                 <a:solidFill>
                   <a:srgbClr val="262F43"/>
                 </a:solidFill>
@@ -13364,6 +13327,1304 @@
     </p:bg>
     <p:spTree>
       <p:nvGrpSpPr>
+        <p:cNvPr id="1" name="">
+          <a:extLst>
+            <a:ext uri="{FF2B5EF4-FFF2-40B4-BE49-F238E27FC236}">
+              <a16:creationId xmlns:a16="http://schemas.microsoft.com/office/drawing/2014/main" id="{B41C93D7-1B80-593D-B17F-09AFB0F8D657}"/>
+            </a:ext>
+          </a:extLst>
+        </p:cNvPr>
+        <p:cNvGrpSpPr/>
+        <p:nvPr/>
+      </p:nvGrpSpPr>
+      <p:grpSpPr>
+        <a:xfrm>
+          <a:off x="0" y="0"/>
+          <a:ext cx="0" cy="0"/>
+          <a:chOff x="0" y="0"/>
+          <a:chExt cx="0" cy="0"/>
+        </a:xfrm>
+      </p:grpSpPr>
+      <p:sp>
+        <p:nvSpPr>
+          <p:cNvPr id="2" name="Freeform 2">
+            <a:extLst>
+              <a:ext uri="{FF2B5EF4-FFF2-40B4-BE49-F238E27FC236}">
+                <a16:creationId xmlns:a16="http://schemas.microsoft.com/office/drawing/2014/main" id="{70B83BDA-006E-CEC2-4D30-57D603E2C23A}"/>
+              </a:ext>
+            </a:extLst>
+          </p:cNvPr>
+          <p:cNvSpPr/>
+          <p:nvPr/>
+        </p:nvSpPr>
+        <p:spPr>
+          <a:xfrm flipH="1" flipV="1">
+            <a:off x="-171306" y="9499384"/>
+            <a:ext cx="1006529" cy="1006529"/>
+          </a:xfrm>
+          <a:custGeom>
+            <a:avLst/>
+            <a:gdLst/>
+            <a:ahLst/>
+            <a:cxnLst/>
+            <a:rect l="l" t="t" r="r" b="b"/>
+            <a:pathLst>
+              <a:path w="1006529" h="1006529">
+                <a:moveTo>
+                  <a:pt x="1006529" y="1006529"/>
+                </a:moveTo>
+                <a:lnTo>
+                  <a:pt x="0" y="1006529"/>
+                </a:lnTo>
+                <a:lnTo>
+                  <a:pt x="0" y="0"/>
+                </a:lnTo>
+                <a:lnTo>
+                  <a:pt x="1006529" y="0"/>
+                </a:lnTo>
+                <a:lnTo>
+                  <a:pt x="1006529" y="1006529"/>
+                </a:lnTo>
+                <a:close/>
+              </a:path>
+            </a:pathLst>
+          </a:custGeom>
+          <a:blipFill>
+            <a:blip r:embed="rId2">
+              <a:extLst>
+                <a:ext uri="{96DAC541-7B7A-43D3-8B79-37D633B846F1}">
+                  <asvg:svgBlip xmlns:asvg="http://schemas.microsoft.com/office/drawing/2016/SVG/main" r:embed="rId3"/>
+                </a:ext>
+              </a:extLst>
+            </a:blip>
+            <a:stretch>
+              <a:fillRect/>
+            </a:stretch>
+          </a:blipFill>
+        </p:spPr>
+      </p:sp>
+      <p:sp>
+        <p:nvSpPr>
+          <p:cNvPr id="3" name="Freeform 3">
+            <a:extLst>
+              <a:ext uri="{FF2B5EF4-FFF2-40B4-BE49-F238E27FC236}">
+                <a16:creationId xmlns:a16="http://schemas.microsoft.com/office/drawing/2014/main" id="{7AD83D3A-FC08-B6E6-A61C-A0C1B52C6748}"/>
+              </a:ext>
+            </a:extLst>
+          </p:cNvPr>
+          <p:cNvSpPr/>
+          <p:nvPr/>
+        </p:nvSpPr>
+        <p:spPr>
+          <a:xfrm>
+            <a:off x="835223" y="9499384"/>
+            <a:ext cx="2013058" cy="1006529"/>
+          </a:xfrm>
+          <a:custGeom>
+            <a:avLst/>
+            <a:gdLst/>
+            <a:ahLst/>
+            <a:cxnLst/>
+            <a:rect l="l" t="t" r="r" b="b"/>
+            <a:pathLst>
+              <a:path w="2013058" h="1006529">
+                <a:moveTo>
+                  <a:pt x="0" y="0"/>
+                </a:moveTo>
+                <a:lnTo>
+                  <a:pt x="2013058" y="0"/>
+                </a:lnTo>
+                <a:lnTo>
+                  <a:pt x="2013058" y="1006529"/>
+                </a:lnTo>
+                <a:lnTo>
+                  <a:pt x="0" y="1006529"/>
+                </a:lnTo>
+                <a:lnTo>
+                  <a:pt x="0" y="0"/>
+                </a:lnTo>
+                <a:close/>
+              </a:path>
+            </a:pathLst>
+          </a:custGeom>
+          <a:blipFill>
+            <a:blip r:embed="rId4">
+              <a:extLst>
+                <a:ext uri="{96DAC541-7B7A-43D3-8B79-37D633B846F1}">
+                  <asvg:svgBlip xmlns:asvg="http://schemas.microsoft.com/office/drawing/2016/SVG/main" r:embed="rId5"/>
+                </a:ext>
+              </a:extLst>
+            </a:blip>
+            <a:stretch>
+              <a:fillRect/>
+            </a:stretch>
+          </a:blipFill>
+        </p:spPr>
+      </p:sp>
+      <p:sp>
+        <p:nvSpPr>
+          <p:cNvPr id="4" name="Freeform 4">
+            <a:extLst>
+              <a:ext uri="{FF2B5EF4-FFF2-40B4-BE49-F238E27FC236}">
+                <a16:creationId xmlns:a16="http://schemas.microsoft.com/office/drawing/2014/main" id="{2336F05F-F5D0-9871-5C8C-52890FE4CF46}"/>
+              </a:ext>
+            </a:extLst>
+          </p:cNvPr>
+          <p:cNvSpPr/>
+          <p:nvPr/>
+        </p:nvSpPr>
+        <p:spPr>
+          <a:xfrm>
+            <a:off x="-171306" y="8492855"/>
+            <a:ext cx="2013058" cy="1006529"/>
+          </a:xfrm>
+          <a:custGeom>
+            <a:avLst/>
+            <a:gdLst/>
+            <a:ahLst/>
+            <a:cxnLst/>
+            <a:rect l="l" t="t" r="r" b="b"/>
+            <a:pathLst>
+              <a:path w="2013058" h="1006529">
+                <a:moveTo>
+                  <a:pt x="0" y="0"/>
+                </a:moveTo>
+                <a:lnTo>
+                  <a:pt x="2013058" y="0"/>
+                </a:lnTo>
+                <a:lnTo>
+                  <a:pt x="2013058" y="1006529"/>
+                </a:lnTo>
+                <a:lnTo>
+                  <a:pt x="0" y="1006529"/>
+                </a:lnTo>
+                <a:lnTo>
+                  <a:pt x="0" y="0"/>
+                </a:lnTo>
+                <a:close/>
+              </a:path>
+            </a:pathLst>
+          </a:custGeom>
+          <a:blipFill>
+            <a:blip r:embed="rId4">
+              <a:extLst>
+                <a:ext uri="{96DAC541-7B7A-43D3-8B79-37D633B846F1}">
+                  <asvg:svgBlip xmlns:asvg="http://schemas.microsoft.com/office/drawing/2016/SVG/main" r:embed="rId5"/>
+                </a:ext>
+              </a:extLst>
+            </a:blip>
+            <a:stretch>
+              <a:fillRect/>
+            </a:stretch>
+          </a:blipFill>
+        </p:spPr>
+      </p:sp>
+      <p:sp>
+        <p:nvSpPr>
+          <p:cNvPr id="5" name="Freeform 5">
+            <a:extLst>
+              <a:ext uri="{FF2B5EF4-FFF2-40B4-BE49-F238E27FC236}">
+                <a16:creationId xmlns:a16="http://schemas.microsoft.com/office/drawing/2014/main" id="{26FC1088-473C-C346-3271-EE6CDDDF2542}"/>
+              </a:ext>
+            </a:extLst>
+          </p:cNvPr>
+          <p:cNvSpPr/>
+          <p:nvPr/>
+        </p:nvSpPr>
+        <p:spPr>
+          <a:xfrm rot="-10800000" flipH="1" flipV="1">
+            <a:off x="-171306" y="6479797"/>
+            <a:ext cx="1006529" cy="1006529"/>
+          </a:xfrm>
+          <a:custGeom>
+            <a:avLst/>
+            <a:gdLst/>
+            <a:ahLst/>
+            <a:cxnLst/>
+            <a:rect l="l" t="t" r="r" b="b"/>
+            <a:pathLst>
+              <a:path w="1006529" h="1006529">
+                <a:moveTo>
+                  <a:pt x="1006529" y="1006529"/>
+                </a:moveTo>
+                <a:lnTo>
+                  <a:pt x="0" y="1006529"/>
+                </a:lnTo>
+                <a:lnTo>
+                  <a:pt x="0" y="0"/>
+                </a:lnTo>
+                <a:lnTo>
+                  <a:pt x="1006529" y="0"/>
+                </a:lnTo>
+                <a:lnTo>
+                  <a:pt x="1006529" y="1006529"/>
+                </a:lnTo>
+                <a:close/>
+              </a:path>
+            </a:pathLst>
+          </a:custGeom>
+          <a:blipFill>
+            <a:blip r:embed="rId2">
+              <a:extLst>
+                <a:ext uri="{96DAC541-7B7A-43D3-8B79-37D633B846F1}">
+                  <asvg:svgBlip xmlns:asvg="http://schemas.microsoft.com/office/drawing/2016/SVG/main" r:embed="rId3"/>
+                </a:ext>
+              </a:extLst>
+            </a:blip>
+            <a:stretch>
+              <a:fillRect/>
+            </a:stretch>
+          </a:blipFill>
+        </p:spPr>
+      </p:sp>
+      <p:sp>
+        <p:nvSpPr>
+          <p:cNvPr id="6" name="Freeform 6">
+            <a:extLst>
+              <a:ext uri="{FF2B5EF4-FFF2-40B4-BE49-F238E27FC236}">
+                <a16:creationId xmlns:a16="http://schemas.microsoft.com/office/drawing/2014/main" id="{0D36E4E7-04AD-427B-BB51-E5D1338A5578}"/>
+              </a:ext>
+            </a:extLst>
+          </p:cNvPr>
+          <p:cNvSpPr/>
+          <p:nvPr/>
+        </p:nvSpPr>
+        <p:spPr>
+          <a:xfrm rot="-10800000">
+            <a:off x="-171306" y="7486326"/>
+            <a:ext cx="2013058" cy="1006529"/>
+          </a:xfrm>
+          <a:custGeom>
+            <a:avLst/>
+            <a:gdLst/>
+            <a:ahLst/>
+            <a:cxnLst/>
+            <a:rect l="l" t="t" r="r" b="b"/>
+            <a:pathLst>
+              <a:path w="2013058" h="1006529">
+                <a:moveTo>
+                  <a:pt x="0" y="0"/>
+                </a:moveTo>
+                <a:lnTo>
+                  <a:pt x="2013058" y="0"/>
+                </a:lnTo>
+                <a:lnTo>
+                  <a:pt x="2013058" y="1006529"/>
+                </a:lnTo>
+                <a:lnTo>
+                  <a:pt x="0" y="1006529"/>
+                </a:lnTo>
+                <a:lnTo>
+                  <a:pt x="0" y="0"/>
+                </a:lnTo>
+                <a:close/>
+              </a:path>
+            </a:pathLst>
+          </a:custGeom>
+          <a:blipFill>
+            <a:blip r:embed="rId4">
+              <a:extLst>
+                <a:ext uri="{96DAC541-7B7A-43D3-8B79-37D633B846F1}">
+                  <asvg:svgBlip xmlns:asvg="http://schemas.microsoft.com/office/drawing/2016/SVG/main" r:embed="rId5"/>
+                </a:ext>
+              </a:extLst>
+            </a:blip>
+            <a:stretch>
+              <a:fillRect/>
+            </a:stretch>
+          </a:blipFill>
+        </p:spPr>
+      </p:sp>
+      <p:sp>
+        <p:nvSpPr>
+          <p:cNvPr id="7" name="Freeform 7">
+            <a:extLst>
+              <a:ext uri="{FF2B5EF4-FFF2-40B4-BE49-F238E27FC236}">
+                <a16:creationId xmlns:a16="http://schemas.microsoft.com/office/drawing/2014/main" id="{7F33EDAF-796C-C715-7F22-E698C5FFC94D}"/>
+              </a:ext>
+            </a:extLst>
+          </p:cNvPr>
+          <p:cNvSpPr/>
+          <p:nvPr/>
+        </p:nvSpPr>
+        <p:spPr>
+          <a:xfrm flipV="1">
+            <a:off x="835223" y="6479797"/>
+            <a:ext cx="1006529" cy="1006529"/>
+          </a:xfrm>
+          <a:custGeom>
+            <a:avLst/>
+            <a:gdLst/>
+            <a:ahLst/>
+            <a:cxnLst/>
+            <a:rect l="l" t="t" r="r" b="b"/>
+            <a:pathLst>
+              <a:path w="1006529" h="1006529">
+                <a:moveTo>
+                  <a:pt x="0" y="1006529"/>
+                </a:moveTo>
+                <a:lnTo>
+                  <a:pt x="1006529" y="1006529"/>
+                </a:lnTo>
+                <a:lnTo>
+                  <a:pt x="1006529" y="0"/>
+                </a:lnTo>
+                <a:lnTo>
+                  <a:pt x="0" y="0"/>
+                </a:lnTo>
+                <a:lnTo>
+                  <a:pt x="0" y="1006529"/>
+                </a:lnTo>
+                <a:close/>
+              </a:path>
+            </a:pathLst>
+          </a:custGeom>
+          <a:blipFill>
+            <a:blip r:embed="rId2">
+              <a:extLst>
+                <a:ext uri="{96DAC541-7B7A-43D3-8B79-37D633B846F1}">
+                  <asvg:svgBlip xmlns:asvg="http://schemas.microsoft.com/office/drawing/2016/SVG/main" r:embed="rId3"/>
+                </a:ext>
+              </a:extLst>
+            </a:blip>
+            <a:stretch>
+              <a:fillRect/>
+            </a:stretch>
+          </a:blipFill>
+        </p:spPr>
+      </p:sp>
+      <p:sp>
+        <p:nvSpPr>
+          <p:cNvPr id="8" name="Freeform 8">
+            <a:extLst>
+              <a:ext uri="{FF2B5EF4-FFF2-40B4-BE49-F238E27FC236}">
+                <a16:creationId xmlns:a16="http://schemas.microsoft.com/office/drawing/2014/main" id="{1BB0FA49-A6F8-77B1-1EA2-76861139E3C1}"/>
+              </a:ext>
+            </a:extLst>
+          </p:cNvPr>
+          <p:cNvSpPr/>
+          <p:nvPr/>
+        </p:nvSpPr>
+        <p:spPr>
+          <a:xfrm rot="-10800000" flipV="1">
+            <a:off x="-171306" y="5473268"/>
+            <a:ext cx="2013058" cy="1006529"/>
+          </a:xfrm>
+          <a:custGeom>
+            <a:avLst/>
+            <a:gdLst/>
+            <a:ahLst/>
+            <a:cxnLst/>
+            <a:rect l="l" t="t" r="r" b="b"/>
+            <a:pathLst>
+              <a:path w="2013058" h="1006529">
+                <a:moveTo>
+                  <a:pt x="0" y="1006529"/>
+                </a:moveTo>
+                <a:lnTo>
+                  <a:pt x="2013058" y="1006529"/>
+                </a:lnTo>
+                <a:lnTo>
+                  <a:pt x="2013058" y="0"/>
+                </a:lnTo>
+                <a:lnTo>
+                  <a:pt x="0" y="0"/>
+                </a:lnTo>
+                <a:lnTo>
+                  <a:pt x="0" y="1006529"/>
+                </a:lnTo>
+                <a:close/>
+              </a:path>
+            </a:pathLst>
+          </a:custGeom>
+          <a:blipFill>
+            <a:blip r:embed="rId4">
+              <a:extLst>
+                <a:ext uri="{96DAC541-7B7A-43D3-8B79-37D633B846F1}">
+                  <asvg:svgBlip xmlns:asvg="http://schemas.microsoft.com/office/drawing/2016/SVG/main" r:embed="rId5"/>
+                </a:ext>
+              </a:extLst>
+            </a:blip>
+            <a:stretch>
+              <a:fillRect/>
+            </a:stretch>
+          </a:blipFill>
+        </p:spPr>
+      </p:sp>
+      <p:sp>
+        <p:nvSpPr>
+          <p:cNvPr id="9" name="Freeform 9">
+            <a:extLst>
+              <a:ext uri="{FF2B5EF4-FFF2-40B4-BE49-F238E27FC236}">
+                <a16:creationId xmlns:a16="http://schemas.microsoft.com/office/drawing/2014/main" id="{BCAA1C0C-3C0F-61F6-2511-2202CB59CCF6}"/>
+              </a:ext>
+            </a:extLst>
+          </p:cNvPr>
+          <p:cNvSpPr/>
+          <p:nvPr/>
+        </p:nvSpPr>
+        <p:spPr>
+          <a:xfrm rot="-10800000" flipH="1" flipV="1">
+            <a:off x="17500852" y="-203632"/>
+            <a:ext cx="1006529" cy="1006529"/>
+          </a:xfrm>
+          <a:custGeom>
+            <a:avLst/>
+            <a:gdLst/>
+            <a:ahLst/>
+            <a:cxnLst/>
+            <a:rect l="l" t="t" r="r" b="b"/>
+            <a:pathLst>
+              <a:path w="1006529" h="1006529">
+                <a:moveTo>
+                  <a:pt x="1006529" y="1006529"/>
+                </a:moveTo>
+                <a:lnTo>
+                  <a:pt x="0" y="1006529"/>
+                </a:lnTo>
+                <a:lnTo>
+                  <a:pt x="0" y="0"/>
+                </a:lnTo>
+                <a:lnTo>
+                  <a:pt x="1006529" y="0"/>
+                </a:lnTo>
+                <a:lnTo>
+                  <a:pt x="1006529" y="1006529"/>
+                </a:lnTo>
+                <a:close/>
+              </a:path>
+            </a:pathLst>
+          </a:custGeom>
+          <a:blipFill>
+            <a:blip r:embed="rId2">
+              <a:extLst>
+                <a:ext uri="{96DAC541-7B7A-43D3-8B79-37D633B846F1}">
+                  <asvg:svgBlip xmlns:asvg="http://schemas.microsoft.com/office/drawing/2016/SVG/main" r:embed="rId3"/>
+                </a:ext>
+              </a:extLst>
+            </a:blip>
+            <a:stretch>
+              <a:fillRect/>
+            </a:stretch>
+          </a:blipFill>
+        </p:spPr>
+      </p:sp>
+      <p:sp>
+        <p:nvSpPr>
+          <p:cNvPr id="10" name="Freeform 10">
+            <a:extLst>
+              <a:ext uri="{FF2B5EF4-FFF2-40B4-BE49-F238E27FC236}">
+                <a16:creationId xmlns:a16="http://schemas.microsoft.com/office/drawing/2014/main" id="{5D3CC0CD-EE8E-8459-6EBF-A06DA25F3150}"/>
+              </a:ext>
+            </a:extLst>
+          </p:cNvPr>
+          <p:cNvSpPr/>
+          <p:nvPr/>
+        </p:nvSpPr>
+        <p:spPr>
+          <a:xfrm rot="-10800000">
+            <a:off x="15487794" y="-203632"/>
+            <a:ext cx="2013058" cy="1006529"/>
+          </a:xfrm>
+          <a:custGeom>
+            <a:avLst/>
+            <a:gdLst/>
+            <a:ahLst/>
+            <a:cxnLst/>
+            <a:rect l="l" t="t" r="r" b="b"/>
+            <a:pathLst>
+              <a:path w="2013058" h="1006529">
+                <a:moveTo>
+                  <a:pt x="0" y="0"/>
+                </a:moveTo>
+                <a:lnTo>
+                  <a:pt x="2013058" y="0"/>
+                </a:lnTo>
+                <a:lnTo>
+                  <a:pt x="2013058" y="1006529"/>
+                </a:lnTo>
+                <a:lnTo>
+                  <a:pt x="0" y="1006529"/>
+                </a:lnTo>
+                <a:lnTo>
+                  <a:pt x="0" y="0"/>
+                </a:lnTo>
+                <a:close/>
+              </a:path>
+            </a:pathLst>
+          </a:custGeom>
+          <a:blipFill>
+            <a:blip r:embed="rId4">
+              <a:extLst>
+                <a:ext uri="{96DAC541-7B7A-43D3-8B79-37D633B846F1}">
+                  <asvg:svgBlip xmlns:asvg="http://schemas.microsoft.com/office/drawing/2016/SVG/main" r:embed="rId5"/>
+                </a:ext>
+              </a:extLst>
+            </a:blip>
+            <a:stretch>
+              <a:fillRect/>
+            </a:stretch>
+          </a:blipFill>
+        </p:spPr>
+      </p:sp>
+      <p:sp>
+        <p:nvSpPr>
+          <p:cNvPr id="11" name="Freeform 11">
+            <a:extLst>
+              <a:ext uri="{FF2B5EF4-FFF2-40B4-BE49-F238E27FC236}">
+                <a16:creationId xmlns:a16="http://schemas.microsoft.com/office/drawing/2014/main" id="{F0E51ABA-3E8B-0540-D47C-707A068A0B12}"/>
+              </a:ext>
+            </a:extLst>
+          </p:cNvPr>
+          <p:cNvSpPr/>
+          <p:nvPr/>
+        </p:nvSpPr>
+        <p:spPr>
+          <a:xfrm rot="-10800000">
+            <a:off x="16494323" y="802897"/>
+            <a:ext cx="2013058" cy="1006529"/>
+          </a:xfrm>
+          <a:custGeom>
+            <a:avLst/>
+            <a:gdLst/>
+            <a:ahLst/>
+            <a:cxnLst/>
+            <a:rect l="l" t="t" r="r" b="b"/>
+            <a:pathLst>
+              <a:path w="2013058" h="1006529">
+                <a:moveTo>
+                  <a:pt x="0" y="0"/>
+                </a:moveTo>
+                <a:lnTo>
+                  <a:pt x="2013058" y="0"/>
+                </a:lnTo>
+                <a:lnTo>
+                  <a:pt x="2013058" y="1006529"/>
+                </a:lnTo>
+                <a:lnTo>
+                  <a:pt x="0" y="1006529"/>
+                </a:lnTo>
+                <a:lnTo>
+                  <a:pt x="0" y="0"/>
+                </a:lnTo>
+                <a:close/>
+              </a:path>
+            </a:pathLst>
+          </a:custGeom>
+          <a:blipFill>
+            <a:blip r:embed="rId4">
+              <a:extLst>
+                <a:ext uri="{96DAC541-7B7A-43D3-8B79-37D633B846F1}">
+                  <asvg:svgBlip xmlns:asvg="http://schemas.microsoft.com/office/drawing/2016/SVG/main" r:embed="rId5"/>
+                </a:ext>
+              </a:extLst>
+            </a:blip>
+            <a:stretch>
+              <a:fillRect/>
+            </a:stretch>
+          </a:blipFill>
+        </p:spPr>
+      </p:sp>
+      <p:sp>
+        <p:nvSpPr>
+          <p:cNvPr id="12" name="Freeform 12">
+            <a:extLst>
+              <a:ext uri="{FF2B5EF4-FFF2-40B4-BE49-F238E27FC236}">
+                <a16:creationId xmlns:a16="http://schemas.microsoft.com/office/drawing/2014/main" id="{2CD3D7A6-CDF7-035F-A113-8F40CFEC38B7}"/>
+              </a:ext>
+            </a:extLst>
+          </p:cNvPr>
+          <p:cNvSpPr/>
+          <p:nvPr/>
+        </p:nvSpPr>
+        <p:spPr>
+          <a:xfrm flipH="1" flipV="1">
+            <a:off x="17500852" y="2815955"/>
+            <a:ext cx="1006529" cy="1006529"/>
+          </a:xfrm>
+          <a:custGeom>
+            <a:avLst/>
+            <a:gdLst/>
+            <a:ahLst/>
+            <a:cxnLst/>
+            <a:rect l="l" t="t" r="r" b="b"/>
+            <a:pathLst>
+              <a:path w="1006529" h="1006529">
+                <a:moveTo>
+                  <a:pt x="1006529" y="1006529"/>
+                </a:moveTo>
+                <a:lnTo>
+                  <a:pt x="0" y="1006529"/>
+                </a:lnTo>
+                <a:lnTo>
+                  <a:pt x="0" y="0"/>
+                </a:lnTo>
+                <a:lnTo>
+                  <a:pt x="1006529" y="0"/>
+                </a:lnTo>
+                <a:lnTo>
+                  <a:pt x="1006529" y="1006529"/>
+                </a:lnTo>
+                <a:close/>
+              </a:path>
+            </a:pathLst>
+          </a:custGeom>
+          <a:blipFill>
+            <a:blip r:embed="rId2">
+              <a:extLst>
+                <a:ext uri="{96DAC541-7B7A-43D3-8B79-37D633B846F1}">
+                  <asvg:svgBlip xmlns:asvg="http://schemas.microsoft.com/office/drawing/2016/SVG/main" r:embed="rId3"/>
+                </a:ext>
+              </a:extLst>
+            </a:blip>
+            <a:stretch>
+              <a:fillRect/>
+            </a:stretch>
+          </a:blipFill>
+        </p:spPr>
+      </p:sp>
+      <p:sp>
+        <p:nvSpPr>
+          <p:cNvPr id="13" name="Freeform 13">
+            <a:extLst>
+              <a:ext uri="{FF2B5EF4-FFF2-40B4-BE49-F238E27FC236}">
+                <a16:creationId xmlns:a16="http://schemas.microsoft.com/office/drawing/2014/main" id="{F98B26E8-1B79-DFB0-6C1B-24002E51D07A}"/>
+              </a:ext>
+            </a:extLst>
+          </p:cNvPr>
+          <p:cNvSpPr/>
+          <p:nvPr/>
+        </p:nvSpPr>
+        <p:spPr>
+          <a:xfrm>
+            <a:off x="16494323" y="1809426"/>
+            <a:ext cx="2013058" cy="1006529"/>
+          </a:xfrm>
+          <a:custGeom>
+            <a:avLst/>
+            <a:gdLst/>
+            <a:ahLst/>
+            <a:cxnLst/>
+            <a:rect l="l" t="t" r="r" b="b"/>
+            <a:pathLst>
+              <a:path w="2013058" h="1006529">
+                <a:moveTo>
+                  <a:pt x="0" y="0"/>
+                </a:moveTo>
+                <a:lnTo>
+                  <a:pt x="2013058" y="0"/>
+                </a:lnTo>
+                <a:lnTo>
+                  <a:pt x="2013058" y="1006529"/>
+                </a:lnTo>
+                <a:lnTo>
+                  <a:pt x="0" y="1006529"/>
+                </a:lnTo>
+                <a:lnTo>
+                  <a:pt x="0" y="0"/>
+                </a:lnTo>
+                <a:close/>
+              </a:path>
+            </a:pathLst>
+          </a:custGeom>
+          <a:blipFill>
+            <a:blip r:embed="rId4">
+              <a:extLst>
+                <a:ext uri="{96DAC541-7B7A-43D3-8B79-37D633B846F1}">
+                  <asvg:svgBlip xmlns:asvg="http://schemas.microsoft.com/office/drawing/2016/SVG/main" r:embed="rId5"/>
+                </a:ext>
+              </a:extLst>
+            </a:blip>
+            <a:stretch>
+              <a:fillRect/>
+            </a:stretch>
+          </a:blipFill>
+        </p:spPr>
+      </p:sp>
+      <p:sp>
+        <p:nvSpPr>
+          <p:cNvPr id="14" name="Freeform 14">
+            <a:extLst>
+              <a:ext uri="{FF2B5EF4-FFF2-40B4-BE49-F238E27FC236}">
+                <a16:creationId xmlns:a16="http://schemas.microsoft.com/office/drawing/2014/main" id="{FC10030C-ADFA-8D18-297C-4FC222B95DC7}"/>
+              </a:ext>
+            </a:extLst>
+          </p:cNvPr>
+          <p:cNvSpPr/>
+          <p:nvPr/>
+        </p:nvSpPr>
+        <p:spPr>
+          <a:xfrm rot="-10800000" flipV="1">
+            <a:off x="16494323" y="2815955"/>
+            <a:ext cx="1006529" cy="1006529"/>
+          </a:xfrm>
+          <a:custGeom>
+            <a:avLst/>
+            <a:gdLst/>
+            <a:ahLst/>
+            <a:cxnLst/>
+            <a:rect l="l" t="t" r="r" b="b"/>
+            <a:pathLst>
+              <a:path w="1006529" h="1006529">
+                <a:moveTo>
+                  <a:pt x="0" y="1006529"/>
+                </a:moveTo>
+                <a:lnTo>
+                  <a:pt x="1006529" y="1006529"/>
+                </a:lnTo>
+                <a:lnTo>
+                  <a:pt x="1006529" y="0"/>
+                </a:lnTo>
+                <a:lnTo>
+                  <a:pt x="0" y="0"/>
+                </a:lnTo>
+                <a:lnTo>
+                  <a:pt x="0" y="1006529"/>
+                </a:lnTo>
+                <a:close/>
+              </a:path>
+            </a:pathLst>
+          </a:custGeom>
+          <a:blipFill>
+            <a:blip r:embed="rId2">
+              <a:extLst>
+                <a:ext uri="{96DAC541-7B7A-43D3-8B79-37D633B846F1}">
+                  <asvg:svgBlip xmlns:asvg="http://schemas.microsoft.com/office/drawing/2016/SVG/main" r:embed="rId3"/>
+                </a:ext>
+              </a:extLst>
+            </a:blip>
+            <a:stretch>
+              <a:fillRect/>
+            </a:stretch>
+          </a:blipFill>
+        </p:spPr>
+      </p:sp>
+      <p:sp>
+        <p:nvSpPr>
+          <p:cNvPr id="15" name="Freeform 15">
+            <a:extLst>
+              <a:ext uri="{FF2B5EF4-FFF2-40B4-BE49-F238E27FC236}">
+                <a16:creationId xmlns:a16="http://schemas.microsoft.com/office/drawing/2014/main" id="{C9A06C85-8203-E1C6-E824-68502D1E9D7C}"/>
+              </a:ext>
+            </a:extLst>
+          </p:cNvPr>
+          <p:cNvSpPr/>
+          <p:nvPr/>
+        </p:nvSpPr>
+        <p:spPr>
+          <a:xfrm flipV="1">
+            <a:off x="16494323" y="3822484"/>
+            <a:ext cx="2013058" cy="1006529"/>
+          </a:xfrm>
+          <a:custGeom>
+            <a:avLst/>
+            <a:gdLst/>
+            <a:ahLst/>
+            <a:cxnLst/>
+            <a:rect l="l" t="t" r="r" b="b"/>
+            <a:pathLst>
+              <a:path w="2013058" h="1006529">
+                <a:moveTo>
+                  <a:pt x="0" y="1006529"/>
+                </a:moveTo>
+                <a:lnTo>
+                  <a:pt x="2013058" y="1006529"/>
+                </a:lnTo>
+                <a:lnTo>
+                  <a:pt x="2013058" y="0"/>
+                </a:lnTo>
+                <a:lnTo>
+                  <a:pt x="0" y="0"/>
+                </a:lnTo>
+                <a:lnTo>
+                  <a:pt x="0" y="1006529"/>
+                </a:lnTo>
+                <a:close/>
+              </a:path>
+            </a:pathLst>
+          </a:custGeom>
+          <a:blipFill>
+            <a:blip r:embed="rId4">
+              <a:extLst>
+                <a:ext uri="{96DAC541-7B7A-43D3-8B79-37D633B846F1}">
+                  <asvg:svgBlip xmlns:asvg="http://schemas.microsoft.com/office/drawing/2016/SVG/main" r:embed="rId5"/>
+                </a:ext>
+              </a:extLst>
+            </a:blip>
+            <a:stretch>
+              <a:fillRect/>
+            </a:stretch>
+          </a:blipFill>
+        </p:spPr>
+      </p:sp>
+      <p:sp>
+        <p:nvSpPr>
+          <p:cNvPr id="16" name="Freeform 16">
+            <a:extLst>
+              <a:ext uri="{FF2B5EF4-FFF2-40B4-BE49-F238E27FC236}">
+                <a16:creationId xmlns:a16="http://schemas.microsoft.com/office/drawing/2014/main" id="{6B17B37B-6A05-E963-E9DF-F963D0B4FDC6}"/>
+              </a:ext>
+            </a:extLst>
+          </p:cNvPr>
+          <p:cNvSpPr/>
+          <p:nvPr/>
+        </p:nvSpPr>
+        <p:spPr>
+          <a:xfrm>
+            <a:off x="1841752" y="8492855"/>
+            <a:ext cx="1006529" cy="1006529"/>
+          </a:xfrm>
+          <a:custGeom>
+            <a:avLst/>
+            <a:gdLst/>
+            <a:ahLst/>
+            <a:cxnLst/>
+            <a:rect l="l" t="t" r="r" b="b"/>
+            <a:pathLst>
+              <a:path w="1006529" h="1006529">
+                <a:moveTo>
+                  <a:pt x="0" y="0"/>
+                </a:moveTo>
+                <a:lnTo>
+                  <a:pt x="1006529" y="0"/>
+                </a:lnTo>
+                <a:lnTo>
+                  <a:pt x="1006529" y="1006529"/>
+                </a:lnTo>
+                <a:lnTo>
+                  <a:pt x="0" y="1006529"/>
+                </a:lnTo>
+                <a:lnTo>
+                  <a:pt x="0" y="0"/>
+                </a:lnTo>
+                <a:close/>
+              </a:path>
+            </a:pathLst>
+          </a:custGeom>
+          <a:blipFill>
+            <a:blip r:embed="rId2">
+              <a:extLst>
+                <a:ext uri="{96DAC541-7B7A-43D3-8B79-37D633B846F1}">
+                  <asvg:svgBlip xmlns:asvg="http://schemas.microsoft.com/office/drawing/2016/SVG/main" r:embed="rId3"/>
+                </a:ext>
+              </a:extLst>
+            </a:blip>
+            <a:stretch>
+              <a:fillRect/>
+            </a:stretch>
+          </a:blipFill>
+        </p:spPr>
+      </p:sp>
+      <p:sp>
+        <p:nvSpPr>
+          <p:cNvPr id="17" name="Freeform 17">
+            <a:extLst>
+              <a:ext uri="{FF2B5EF4-FFF2-40B4-BE49-F238E27FC236}">
+                <a16:creationId xmlns:a16="http://schemas.microsoft.com/office/drawing/2014/main" id="{66C78C52-1D4B-1E55-3E13-A4756379C838}"/>
+              </a:ext>
+            </a:extLst>
+          </p:cNvPr>
+          <p:cNvSpPr/>
+          <p:nvPr/>
+        </p:nvSpPr>
+        <p:spPr>
+          <a:xfrm flipH="1" flipV="1">
+            <a:off x="15487794" y="802897"/>
+            <a:ext cx="1006529" cy="1006529"/>
+          </a:xfrm>
+          <a:custGeom>
+            <a:avLst/>
+            <a:gdLst/>
+            <a:ahLst/>
+            <a:cxnLst/>
+            <a:rect l="l" t="t" r="r" b="b"/>
+            <a:pathLst>
+              <a:path w="1006529" h="1006529">
+                <a:moveTo>
+                  <a:pt x="1006529" y="1006529"/>
+                </a:moveTo>
+                <a:lnTo>
+                  <a:pt x="0" y="1006529"/>
+                </a:lnTo>
+                <a:lnTo>
+                  <a:pt x="0" y="0"/>
+                </a:lnTo>
+                <a:lnTo>
+                  <a:pt x="1006529" y="0"/>
+                </a:lnTo>
+                <a:lnTo>
+                  <a:pt x="1006529" y="1006529"/>
+                </a:lnTo>
+                <a:close/>
+              </a:path>
+            </a:pathLst>
+          </a:custGeom>
+          <a:blipFill>
+            <a:blip r:embed="rId2">
+              <a:extLst>
+                <a:ext uri="{96DAC541-7B7A-43D3-8B79-37D633B846F1}">
+                  <asvg:svgBlip xmlns:asvg="http://schemas.microsoft.com/office/drawing/2016/SVG/main" r:embed="rId3"/>
+                </a:ext>
+              </a:extLst>
+            </a:blip>
+            <a:stretch>
+              <a:fillRect/>
+            </a:stretch>
+          </a:blipFill>
+        </p:spPr>
+      </p:sp>
+      <p:sp>
+        <p:nvSpPr>
+          <p:cNvPr id="18" name="Freeform 18">
+            <a:extLst>
+              <a:ext uri="{FF2B5EF4-FFF2-40B4-BE49-F238E27FC236}">
+                <a16:creationId xmlns:a16="http://schemas.microsoft.com/office/drawing/2014/main" id="{158D1134-B628-12CD-CC50-91D5A23750FB}"/>
+              </a:ext>
+            </a:extLst>
+          </p:cNvPr>
+          <p:cNvSpPr/>
+          <p:nvPr/>
+        </p:nvSpPr>
+        <p:spPr>
+          <a:xfrm rot="-10800000" flipH="1">
+            <a:off x="1841752" y="7486326"/>
+            <a:ext cx="1006529" cy="1006529"/>
+          </a:xfrm>
+          <a:custGeom>
+            <a:avLst/>
+            <a:gdLst/>
+            <a:ahLst/>
+            <a:cxnLst/>
+            <a:rect l="l" t="t" r="r" b="b"/>
+            <a:pathLst>
+              <a:path w="1006529" h="1006529">
+                <a:moveTo>
+                  <a:pt x="1006529" y="0"/>
+                </a:moveTo>
+                <a:lnTo>
+                  <a:pt x="0" y="0"/>
+                </a:lnTo>
+                <a:lnTo>
+                  <a:pt x="0" y="1006529"/>
+                </a:lnTo>
+                <a:lnTo>
+                  <a:pt x="1006529" y="1006529"/>
+                </a:lnTo>
+                <a:lnTo>
+                  <a:pt x="1006529" y="0"/>
+                </a:lnTo>
+                <a:close/>
+              </a:path>
+            </a:pathLst>
+          </a:custGeom>
+          <a:blipFill>
+            <a:blip r:embed="rId2">
+              <a:extLst>
+                <a:ext uri="{96DAC541-7B7A-43D3-8B79-37D633B846F1}">
+                  <asvg:svgBlip xmlns:asvg="http://schemas.microsoft.com/office/drawing/2016/SVG/main" r:embed="rId3"/>
+                </a:ext>
+              </a:extLst>
+            </a:blip>
+            <a:stretch>
+              <a:fillRect/>
+            </a:stretch>
+          </a:blipFill>
+        </p:spPr>
+      </p:sp>
+      <p:sp>
+        <p:nvSpPr>
+          <p:cNvPr id="19" name="Freeform 19">
+            <a:extLst>
+              <a:ext uri="{FF2B5EF4-FFF2-40B4-BE49-F238E27FC236}">
+                <a16:creationId xmlns:a16="http://schemas.microsoft.com/office/drawing/2014/main" id="{51ADE568-D166-D7C1-78B7-80D1080D0203}"/>
+              </a:ext>
+            </a:extLst>
+          </p:cNvPr>
+          <p:cNvSpPr/>
+          <p:nvPr/>
+        </p:nvSpPr>
+        <p:spPr>
+          <a:xfrm rot="-10800000" flipV="1">
+            <a:off x="15487794" y="1809426"/>
+            <a:ext cx="1006529" cy="1006529"/>
+          </a:xfrm>
+          <a:custGeom>
+            <a:avLst/>
+            <a:gdLst/>
+            <a:ahLst/>
+            <a:cxnLst/>
+            <a:rect l="l" t="t" r="r" b="b"/>
+            <a:pathLst>
+              <a:path w="1006529" h="1006529">
+                <a:moveTo>
+                  <a:pt x="0" y="1006529"/>
+                </a:moveTo>
+                <a:lnTo>
+                  <a:pt x="1006529" y="1006529"/>
+                </a:lnTo>
+                <a:lnTo>
+                  <a:pt x="1006529" y="0"/>
+                </a:lnTo>
+                <a:lnTo>
+                  <a:pt x="0" y="0"/>
+                </a:lnTo>
+                <a:lnTo>
+                  <a:pt x="0" y="1006529"/>
+                </a:lnTo>
+                <a:close/>
+              </a:path>
+            </a:pathLst>
+          </a:custGeom>
+          <a:blipFill>
+            <a:blip r:embed="rId2">
+              <a:extLst>
+                <a:ext uri="{96DAC541-7B7A-43D3-8B79-37D633B846F1}">
+                  <asvg:svgBlip xmlns:asvg="http://schemas.microsoft.com/office/drawing/2016/SVG/main" r:embed="rId3"/>
+                </a:ext>
+              </a:extLst>
+            </a:blip>
+            <a:stretch>
+              <a:fillRect/>
+            </a:stretch>
+          </a:blipFill>
+        </p:spPr>
+      </p:sp>
+      <p:sp>
+        <p:nvSpPr>
+          <p:cNvPr id="21" name="TextBox 21">
+            <a:extLst>
+              <a:ext uri="{FF2B5EF4-FFF2-40B4-BE49-F238E27FC236}">
+                <a16:creationId xmlns:a16="http://schemas.microsoft.com/office/drawing/2014/main" id="{E26F755B-EB84-1F05-19DE-04440CBD348F}"/>
+              </a:ext>
+            </a:extLst>
+          </p:cNvPr>
+          <p:cNvSpPr txBox="1"/>
+          <p:nvPr/>
+        </p:nvSpPr>
+        <p:spPr>
+          <a:xfrm>
+            <a:off x="3925005" y="782726"/>
+            <a:ext cx="10437990" cy="2775632"/>
+          </a:xfrm>
+          <a:prstGeom prst="rect">
+            <a:avLst/>
+          </a:prstGeom>
+        </p:spPr>
+        <p:txBody>
+          <a:bodyPr lIns="0" tIns="0" rIns="0" bIns="0" rtlCol="0" anchor="t">
+            <a:spAutoFit/>
+          </a:bodyPr>
+          <a:lstStyle/>
+          <a:p>
+            <a:pPr algn="ctr">
+              <a:lnSpc>
+                <a:spcPts val="10842"/>
+              </a:lnSpc>
+            </a:pPr>
+            <a:r>
+              <a:rPr lang="en-US" sz="13222" dirty="0">
+                <a:solidFill>
+                  <a:srgbClr val="262F43"/>
+                </a:solidFill>
+                <a:latin typeface="Impact"/>
+                <a:ea typeface="Impact"/>
+                <a:cs typeface="Impact"/>
+                <a:sym typeface="Impact"/>
+              </a:rPr>
+              <a:t>Project Outcome</a:t>
+            </a:r>
+          </a:p>
+        </p:txBody>
+      </p:sp>
+      <p:sp>
+        <p:nvSpPr>
+          <p:cNvPr id="22" name="TextBox 22">
+            <a:extLst>
+              <a:ext uri="{FF2B5EF4-FFF2-40B4-BE49-F238E27FC236}">
+                <a16:creationId xmlns:a16="http://schemas.microsoft.com/office/drawing/2014/main" id="{9E3E28A0-6366-706D-ABC7-48052BC3C6D5}"/>
+              </a:ext>
+            </a:extLst>
+          </p:cNvPr>
+          <p:cNvSpPr txBox="1"/>
+          <p:nvPr/>
+        </p:nvSpPr>
+        <p:spPr>
+          <a:xfrm>
+            <a:off x="3449439" y="3590103"/>
+            <a:ext cx="12996809" cy="4902752"/>
+          </a:xfrm>
+          <a:prstGeom prst="rect">
+            <a:avLst/>
+          </a:prstGeom>
+        </p:spPr>
+        <p:txBody>
+          <a:bodyPr wrap="square" lIns="0" tIns="0" rIns="0" bIns="0" rtlCol="0" anchor="t">
+            <a:spAutoFit/>
+          </a:bodyPr>
+          <a:lstStyle/>
+          <a:p>
+            <a:pPr marL="742950" marR="453390" lvl="1" indent="-285750">
+              <a:lnSpc>
+                <a:spcPct val="150000"/>
+              </a:lnSpc>
+              <a:spcBef>
+                <a:spcPts val="530"/>
+              </a:spcBef>
+              <a:buFont typeface="+mj-lt"/>
+              <a:buAutoNum type="alphaUcPeriod"/>
+            </a:pPr>
+            <a:r>
+              <a:rPr lang="en-US" sz="2400" dirty="0">
+                <a:effectLst/>
+                <a:latin typeface="Times New Roman" panose="02020603050405020304" pitchFamily="18" charset="0"/>
+                <a:ea typeface="Times New Roman" panose="02020603050405020304" pitchFamily="18" charset="0"/>
+                <a:cs typeface="Times New Roman" panose="02020603050405020304" pitchFamily="18" charset="0"/>
+              </a:rPr>
+              <a:t> Presentation at KR Mangalam University, Gurgaon</a:t>
+            </a:r>
+          </a:p>
+          <a:p>
+            <a:pPr algn="l">
+              <a:lnSpc>
+                <a:spcPts val="4349"/>
+              </a:lnSpc>
+            </a:pPr>
+            <a:r>
+              <a:rPr lang="en-US" sz="2400" dirty="0">
+                <a:latin typeface="Times New Roman" panose="02020603050405020304" pitchFamily="18" charset="0"/>
+                <a:ea typeface="Clear Sans"/>
+                <a:cs typeface="Times New Roman" panose="02020603050405020304" pitchFamily="18" charset="0"/>
+                <a:sym typeface="Clear Sans"/>
+              </a:rPr>
+              <a:t>           We presented our paper at KR Mangalam University where we received the acceptance for </a:t>
+            </a:r>
+          </a:p>
+          <a:p>
+            <a:pPr algn="l">
+              <a:lnSpc>
+                <a:spcPts val="4349"/>
+              </a:lnSpc>
+            </a:pPr>
+            <a:r>
+              <a:rPr lang="en-US" sz="2400" dirty="0">
+                <a:latin typeface="Times New Roman" panose="02020603050405020304" pitchFamily="18" charset="0"/>
+                <a:ea typeface="Clear Sans"/>
+                <a:cs typeface="Times New Roman" panose="02020603050405020304" pitchFamily="18" charset="0"/>
+                <a:sym typeface="Clear Sans"/>
+              </a:rPr>
+              <a:t>           our abstract.</a:t>
+            </a:r>
+          </a:p>
+          <a:p>
+            <a:pPr algn="l">
+              <a:lnSpc>
+                <a:spcPts val="4349"/>
+              </a:lnSpc>
+            </a:pPr>
+            <a:r>
+              <a:rPr lang="en-US" sz="2400" dirty="0">
+                <a:latin typeface="Times New Roman" panose="02020603050405020304" pitchFamily="18" charset="0"/>
+                <a:ea typeface="Clear Sans"/>
+                <a:cs typeface="Times New Roman" panose="02020603050405020304" pitchFamily="18" charset="0"/>
+                <a:sym typeface="Clear Sans"/>
+              </a:rPr>
+              <a:t>       </a:t>
+            </a:r>
+          </a:p>
+          <a:p>
+            <a:pPr algn="l">
+              <a:lnSpc>
+                <a:spcPts val="4349"/>
+              </a:lnSpc>
+            </a:pPr>
+            <a:r>
+              <a:rPr lang="en-US" sz="2400" dirty="0">
+                <a:latin typeface="Times New Roman" panose="02020603050405020304" pitchFamily="18" charset="0"/>
+                <a:ea typeface="Clear Sans"/>
+                <a:cs typeface="Times New Roman" panose="02020603050405020304" pitchFamily="18" charset="0"/>
+                <a:sym typeface="Clear Sans"/>
+              </a:rPr>
+              <a:t>      B. Patent</a:t>
+            </a:r>
+          </a:p>
+          <a:p>
+            <a:pPr algn="l">
+              <a:lnSpc>
+                <a:spcPts val="4349"/>
+              </a:lnSpc>
+            </a:pPr>
+            <a:r>
+              <a:rPr lang="en-US" sz="2400" dirty="0">
+                <a:latin typeface="Times New Roman" panose="02020603050405020304" pitchFamily="18" charset="0"/>
+                <a:ea typeface="Clear Sans"/>
+                <a:cs typeface="Times New Roman" panose="02020603050405020304" pitchFamily="18" charset="0"/>
+                <a:sym typeface="Clear Sans"/>
+              </a:rPr>
+              <a:t>	Our project is going through a patent procedure. </a:t>
+            </a:r>
+            <a:r>
+              <a:rPr lang="en-US" sz="2400" dirty="0">
+                <a:effectLst/>
+                <a:latin typeface="Times New Roman" panose="02020603050405020304" pitchFamily="18" charset="0"/>
+                <a:ea typeface="Times New Roman" panose="02020603050405020304" pitchFamily="18" charset="0"/>
+                <a:cs typeface="Times New Roman" panose="02020603050405020304" pitchFamily="18" charset="0"/>
+              </a:rPr>
+              <a:t>The application, currently under review by 	the patent office, covers the innovative integration methodology and architectural design that 	enables superior human activity recognition performance as documented.</a:t>
+            </a:r>
+            <a:endParaRPr lang="en-US" sz="2400" dirty="0">
+              <a:latin typeface="Times New Roman" panose="02020603050405020304" pitchFamily="18" charset="0"/>
+              <a:ea typeface="Clear Sans"/>
+              <a:cs typeface="Times New Roman" panose="02020603050405020304" pitchFamily="18" charset="0"/>
+              <a:sym typeface="Clear Sans"/>
+            </a:endParaRPr>
+          </a:p>
+          <a:p>
+            <a:pPr algn="l">
+              <a:lnSpc>
+                <a:spcPts val="4349"/>
+              </a:lnSpc>
+            </a:pPr>
+            <a:r>
+              <a:rPr lang="en-US" sz="2400" dirty="0">
+                <a:solidFill>
+                  <a:srgbClr val="262F43"/>
+                </a:solidFill>
+                <a:latin typeface="Clear Sans"/>
+                <a:ea typeface="Clear Sans"/>
+                <a:cs typeface="Clear Sans"/>
+                <a:sym typeface="Clear Sans"/>
+              </a:rPr>
+              <a:t>    </a:t>
+            </a:r>
+          </a:p>
+        </p:txBody>
+      </p:sp>
+    </p:spTree>
+    <p:extLst>
+      <p:ext uri="{BB962C8B-B14F-4D97-AF65-F5344CB8AC3E}">
+        <p14:creationId xmlns:p14="http://schemas.microsoft.com/office/powerpoint/2010/main" val="680680934"/>
+      </p:ext>
+    </p:extLst>
+  </p:cSld>
+  <p:clrMapOvr>
+    <a:masterClrMapping/>
+  </p:clrMapOvr>
+</p:sld>
+</file>
+
+<file path=ppt/slides/slide19.xml><?xml version="1.0" encoding="utf-8"?>
+<p:sld xmlns:a="http://schemas.openxmlformats.org/drawingml/2006/main" xmlns:r="http://schemas.openxmlformats.org/officeDocument/2006/relationships" xmlns:p="http://schemas.openxmlformats.org/presentationml/2006/main">
+  <p:cSld>
+    <p:bg>
+      <p:bgPr>
+        <a:solidFill>
+          <a:srgbClr val="E0FAFF"/>
+        </a:solidFill>
+        <a:effectLst/>
+      </p:bgPr>
+    </p:bg>
+    <p:spTree>
+      <p:nvGrpSpPr>
         <p:cNvPr id="1" name=""/>
         <p:cNvGrpSpPr/>
         <p:nvPr/>
@@ -14961,7 +16222,1305 @@
 </p:sld>
 </file>
 
-<file path=ppt/slides/slide19.xml><?xml version="1.0" encoding="utf-8"?>
+<file path=ppt/slides/slide2.xml><?xml version="1.0" encoding="utf-8"?>
+<p:sld xmlns:a="http://schemas.openxmlformats.org/drawingml/2006/main" xmlns:r="http://schemas.openxmlformats.org/officeDocument/2006/relationships" xmlns:p="http://schemas.openxmlformats.org/presentationml/2006/main">
+  <p:cSld>
+    <p:bg>
+      <p:bgPr>
+        <a:solidFill>
+          <a:srgbClr val="E0FAFF"/>
+        </a:solidFill>
+        <a:effectLst/>
+      </p:bgPr>
+    </p:bg>
+    <p:spTree>
+      <p:nvGrpSpPr>
+        <p:cNvPr id="1" name=""/>
+        <p:cNvGrpSpPr/>
+        <p:nvPr/>
+      </p:nvGrpSpPr>
+      <p:grpSpPr>
+        <a:xfrm>
+          <a:off x="0" y="0"/>
+          <a:ext cx="0" cy="0"/>
+          <a:chOff x="0" y="0"/>
+          <a:chExt cx="0" cy="0"/>
+        </a:xfrm>
+      </p:grpSpPr>
+      <p:sp>
+        <p:nvSpPr>
+          <p:cNvPr id="2" name="Freeform 2"/>
+          <p:cNvSpPr/>
+          <p:nvPr/>
+        </p:nvSpPr>
+        <p:spPr>
+          <a:xfrm flipH="1" flipV="1">
+            <a:off x="-171306" y="9499384"/>
+            <a:ext cx="1006529" cy="1006529"/>
+          </a:xfrm>
+          <a:custGeom>
+            <a:avLst/>
+            <a:gdLst/>
+            <a:ahLst/>
+            <a:cxnLst/>
+            <a:rect l="l" t="t" r="r" b="b"/>
+            <a:pathLst>
+              <a:path w="1006529" h="1006529">
+                <a:moveTo>
+                  <a:pt x="1006529" y="1006529"/>
+                </a:moveTo>
+                <a:lnTo>
+                  <a:pt x="0" y="1006529"/>
+                </a:lnTo>
+                <a:lnTo>
+                  <a:pt x="0" y="0"/>
+                </a:lnTo>
+                <a:lnTo>
+                  <a:pt x="1006529" y="0"/>
+                </a:lnTo>
+                <a:lnTo>
+                  <a:pt x="1006529" y="1006529"/>
+                </a:lnTo>
+                <a:close/>
+              </a:path>
+            </a:pathLst>
+          </a:custGeom>
+          <a:blipFill>
+            <a:blip r:embed="rId2">
+              <a:extLst>
+                <a:ext uri="{96DAC541-7B7A-43D3-8B79-37D633B846F1}">
+                  <asvg:svgBlip xmlns:asvg="http://schemas.microsoft.com/office/drawing/2016/SVG/main" r:embed="rId3"/>
+                </a:ext>
+              </a:extLst>
+            </a:blip>
+            <a:stretch>
+              <a:fillRect/>
+            </a:stretch>
+          </a:blipFill>
+        </p:spPr>
+      </p:sp>
+      <p:sp>
+        <p:nvSpPr>
+          <p:cNvPr id="3" name="Freeform 3"/>
+          <p:cNvSpPr/>
+          <p:nvPr/>
+        </p:nvSpPr>
+        <p:spPr>
+          <a:xfrm>
+            <a:off x="835223" y="9499384"/>
+            <a:ext cx="2013058" cy="1006529"/>
+          </a:xfrm>
+          <a:custGeom>
+            <a:avLst/>
+            <a:gdLst/>
+            <a:ahLst/>
+            <a:cxnLst/>
+            <a:rect l="l" t="t" r="r" b="b"/>
+            <a:pathLst>
+              <a:path w="2013058" h="1006529">
+                <a:moveTo>
+                  <a:pt x="0" y="0"/>
+                </a:moveTo>
+                <a:lnTo>
+                  <a:pt x="2013058" y="0"/>
+                </a:lnTo>
+                <a:lnTo>
+                  <a:pt x="2013058" y="1006529"/>
+                </a:lnTo>
+                <a:lnTo>
+                  <a:pt x="0" y="1006529"/>
+                </a:lnTo>
+                <a:lnTo>
+                  <a:pt x="0" y="0"/>
+                </a:lnTo>
+                <a:close/>
+              </a:path>
+            </a:pathLst>
+          </a:custGeom>
+          <a:blipFill>
+            <a:blip r:embed="rId4">
+              <a:extLst>
+                <a:ext uri="{96DAC541-7B7A-43D3-8B79-37D633B846F1}">
+                  <asvg:svgBlip xmlns:asvg="http://schemas.microsoft.com/office/drawing/2016/SVG/main" r:embed="rId5"/>
+                </a:ext>
+              </a:extLst>
+            </a:blip>
+            <a:stretch>
+              <a:fillRect/>
+            </a:stretch>
+          </a:blipFill>
+        </p:spPr>
+      </p:sp>
+      <p:sp>
+        <p:nvSpPr>
+          <p:cNvPr id="4" name="Freeform 4"/>
+          <p:cNvSpPr/>
+          <p:nvPr/>
+        </p:nvSpPr>
+        <p:spPr>
+          <a:xfrm>
+            <a:off x="-171306" y="8492855"/>
+            <a:ext cx="2013058" cy="1006529"/>
+          </a:xfrm>
+          <a:custGeom>
+            <a:avLst/>
+            <a:gdLst/>
+            <a:ahLst/>
+            <a:cxnLst/>
+            <a:rect l="l" t="t" r="r" b="b"/>
+            <a:pathLst>
+              <a:path w="2013058" h="1006529">
+                <a:moveTo>
+                  <a:pt x="0" y="0"/>
+                </a:moveTo>
+                <a:lnTo>
+                  <a:pt x="2013058" y="0"/>
+                </a:lnTo>
+                <a:lnTo>
+                  <a:pt x="2013058" y="1006529"/>
+                </a:lnTo>
+                <a:lnTo>
+                  <a:pt x="0" y="1006529"/>
+                </a:lnTo>
+                <a:lnTo>
+                  <a:pt x="0" y="0"/>
+                </a:lnTo>
+                <a:close/>
+              </a:path>
+            </a:pathLst>
+          </a:custGeom>
+          <a:blipFill>
+            <a:blip r:embed="rId4">
+              <a:extLst>
+                <a:ext uri="{96DAC541-7B7A-43D3-8B79-37D633B846F1}">
+                  <asvg:svgBlip xmlns:asvg="http://schemas.microsoft.com/office/drawing/2016/SVG/main" r:embed="rId5"/>
+                </a:ext>
+              </a:extLst>
+            </a:blip>
+            <a:stretch>
+              <a:fillRect/>
+            </a:stretch>
+          </a:blipFill>
+        </p:spPr>
+      </p:sp>
+      <p:sp>
+        <p:nvSpPr>
+          <p:cNvPr id="5" name="Freeform 5"/>
+          <p:cNvSpPr/>
+          <p:nvPr/>
+        </p:nvSpPr>
+        <p:spPr>
+          <a:xfrm rot="-10800000" flipH="1" flipV="1">
+            <a:off x="-171306" y="6479797"/>
+            <a:ext cx="1006529" cy="1006529"/>
+          </a:xfrm>
+          <a:custGeom>
+            <a:avLst/>
+            <a:gdLst/>
+            <a:ahLst/>
+            <a:cxnLst/>
+            <a:rect l="l" t="t" r="r" b="b"/>
+            <a:pathLst>
+              <a:path w="1006529" h="1006529">
+                <a:moveTo>
+                  <a:pt x="1006529" y="1006529"/>
+                </a:moveTo>
+                <a:lnTo>
+                  <a:pt x="0" y="1006529"/>
+                </a:lnTo>
+                <a:lnTo>
+                  <a:pt x="0" y="0"/>
+                </a:lnTo>
+                <a:lnTo>
+                  <a:pt x="1006529" y="0"/>
+                </a:lnTo>
+                <a:lnTo>
+                  <a:pt x="1006529" y="1006529"/>
+                </a:lnTo>
+                <a:close/>
+              </a:path>
+            </a:pathLst>
+          </a:custGeom>
+          <a:blipFill>
+            <a:blip r:embed="rId2">
+              <a:extLst>
+                <a:ext uri="{96DAC541-7B7A-43D3-8B79-37D633B846F1}">
+                  <asvg:svgBlip xmlns:asvg="http://schemas.microsoft.com/office/drawing/2016/SVG/main" r:embed="rId3"/>
+                </a:ext>
+              </a:extLst>
+            </a:blip>
+            <a:stretch>
+              <a:fillRect/>
+            </a:stretch>
+          </a:blipFill>
+        </p:spPr>
+      </p:sp>
+      <p:sp>
+        <p:nvSpPr>
+          <p:cNvPr id="6" name="Freeform 6"/>
+          <p:cNvSpPr/>
+          <p:nvPr/>
+        </p:nvSpPr>
+        <p:spPr>
+          <a:xfrm rot="-10800000">
+            <a:off x="-171306" y="7486326"/>
+            <a:ext cx="2013058" cy="1006529"/>
+          </a:xfrm>
+          <a:custGeom>
+            <a:avLst/>
+            <a:gdLst/>
+            <a:ahLst/>
+            <a:cxnLst/>
+            <a:rect l="l" t="t" r="r" b="b"/>
+            <a:pathLst>
+              <a:path w="2013058" h="1006529">
+                <a:moveTo>
+                  <a:pt x="0" y="0"/>
+                </a:moveTo>
+                <a:lnTo>
+                  <a:pt x="2013058" y="0"/>
+                </a:lnTo>
+                <a:lnTo>
+                  <a:pt x="2013058" y="1006529"/>
+                </a:lnTo>
+                <a:lnTo>
+                  <a:pt x="0" y="1006529"/>
+                </a:lnTo>
+                <a:lnTo>
+                  <a:pt x="0" y="0"/>
+                </a:lnTo>
+                <a:close/>
+              </a:path>
+            </a:pathLst>
+          </a:custGeom>
+          <a:blipFill>
+            <a:blip r:embed="rId4">
+              <a:extLst>
+                <a:ext uri="{96DAC541-7B7A-43D3-8B79-37D633B846F1}">
+                  <asvg:svgBlip xmlns:asvg="http://schemas.microsoft.com/office/drawing/2016/SVG/main" r:embed="rId5"/>
+                </a:ext>
+              </a:extLst>
+            </a:blip>
+            <a:stretch>
+              <a:fillRect/>
+            </a:stretch>
+          </a:blipFill>
+        </p:spPr>
+      </p:sp>
+      <p:sp>
+        <p:nvSpPr>
+          <p:cNvPr id="7" name="Freeform 7"/>
+          <p:cNvSpPr/>
+          <p:nvPr/>
+        </p:nvSpPr>
+        <p:spPr>
+          <a:xfrm flipV="1">
+            <a:off x="835223" y="6479797"/>
+            <a:ext cx="1006529" cy="1006529"/>
+          </a:xfrm>
+          <a:custGeom>
+            <a:avLst/>
+            <a:gdLst/>
+            <a:ahLst/>
+            <a:cxnLst/>
+            <a:rect l="l" t="t" r="r" b="b"/>
+            <a:pathLst>
+              <a:path w="1006529" h="1006529">
+                <a:moveTo>
+                  <a:pt x="0" y="1006529"/>
+                </a:moveTo>
+                <a:lnTo>
+                  <a:pt x="1006529" y="1006529"/>
+                </a:lnTo>
+                <a:lnTo>
+                  <a:pt x="1006529" y="0"/>
+                </a:lnTo>
+                <a:lnTo>
+                  <a:pt x="0" y="0"/>
+                </a:lnTo>
+                <a:lnTo>
+                  <a:pt x="0" y="1006529"/>
+                </a:lnTo>
+                <a:close/>
+              </a:path>
+            </a:pathLst>
+          </a:custGeom>
+          <a:blipFill>
+            <a:blip r:embed="rId2">
+              <a:extLst>
+                <a:ext uri="{96DAC541-7B7A-43D3-8B79-37D633B846F1}">
+                  <asvg:svgBlip xmlns:asvg="http://schemas.microsoft.com/office/drawing/2016/SVG/main" r:embed="rId3"/>
+                </a:ext>
+              </a:extLst>
+            </a:blip>
+            <a:stretch>
+              <a:fillRect/>
+            </a:stretch>
+          </a:blipFill>
+        </p:spPr>
+      </p:sp>
+      <p:sp>
+        <p:nvSpPr>
+          <p:cNvPr id="8" name="Freeform 8"/>
+          <p:cNvSpPr/>
+          <p:nvPr/>
+        </p:nvSpPr>
+        <p:spPr>
+          <a:xfrm rot="-10800000" flipV="1">
+            <a:off x="-171306" y="5473268"/>
+            <a:ext cx="2013058" cy="1006529"/>
+          </a:xfrm>
+          <a:custGeom>
+            <a:avLst/>
+            <a:gdLst/>
+            <a:ahLst/>
+            <a:cxnLst/>
+            <a:rect l="l" t="t" r="r" b="b"/>
+            <a:pathLst>
+              <a:path w="2013058" h="1006529">
+                <a:moveTo>
+                  <a:pt x="0" y="1006529"/>
+                </a:moveTo>
+                <a:lnTo>
+                  <a:pt x="2013058" y="1006529"/>
+                </a:lnTo>
+                <a:lnTo>
+                  <a:pt x="2013058" y="0"/>
+                </a:lnTo>
+                <a:lnTo>
+                  <a:pt x="0" y="0"/>
+                </a:lnTo>
+                <a:lnTo>
+                  <a:pt x="0" y="1006529"/>
+                </a:lnTo>
+                <a:close/>
+              </a:path>
+            </a:pathLst>
+          </a:custGeom>
+          <a:blipFill>
+            <a:blip r:embed="rId4">
+              <a:extLst>
+                <a:ext uri="{96DAC541-7B7A-43D3-8B79-37D633B846F1}">
+                  <asvg:svgBlip xmlns:asvg="http://schemas.microsoft.com/office/drawing/2016/SVG/main" r:embed="rId5"/>
+                </a:ext>
+              </a:extLst>
+            </a:blip>
+            <a:stretch>
+              <a:fillRect/>
+            </a:stretch>
+          </a:blipFill>
+        </p:spPr>
+      </p:sp>
+      <p:sp>
+        <p:nvSpPr>
+          <p:cNvPr id="9" name="Freeform 9"/>
+          <p:cNvSpPr/>
+          <p:nvPr/>
+        </p:nvSpPr>
+        <p:spPr>
+          <a:xfrm rot="-10800000" flipH="1" flipV="1">
+            <a:off x="17500852" y="-203632"/>
+            <a:ext cx="1006529" cy="1006529"/>
+          </a:xfrm>
+          <a:custGeom>
+            <a:avLst/>
+            <a:gdLst/>
+            <a:ahLst/>
+            <a:cxnLst/>
+            <a:rect l="l" t="t" r="r" b="b"/>
+            <a:pathLst>
+              <a:path w="1006529" h="1006529">
+                <a:moveTo>
+                  <a:pt x="1006529" y="1006529"/>
+                </a:moveTo>
+                <a:lnTo>
+                  <a:pt x="0" y="1006529"/>
+                </a:lnTo>
+                <a:lnTo>
+                  <a:pt x="0" y="0"/>
+                </a:lnTo>
+                <a:lnTo>
+                  <a:pt x="1006529" y="0"/>
+                </a:lnTo>
+                <a:lnTo>
+                  <a:pt x="1006529" y="1006529"/>
+                </a:lnTo>
+                <a:close/>
+              </a:path>
+            </a:pathLst>
+          </a:custGeom>
+          <a:blipFill>
+            <a:blip r:embed="rId2">
+              <a:extLst>
+                <a:ext uri="{96DAC541-7B7A-43D3-8B79-37D633B846F1}">
+                  <asvg:svgBlip xmlns:asvg="http://schemas.microsoft.com/office/drawing/2016/SVG/main" r:embed="rId3"/>
+                </a:ext>
+              </a:extLst>
+            </a:blip>
+            <a:stretch>
+              <a:fillRect/>
+            </a:stretch>
+          </a:blipFill>
+        </p:spPr>
+      </p:sp>
+      <p:sp>
+        <p:nvSpPr>
+          <p:cNvPr id="10" name="Freeform 10"/>
+          <p:cNvSpPr/>
+          <p:nvPr/>
+        </p:nvSpPr>
+        <p:spPr>
+          <a:xfrm rot="-10800000">
+            <a:off x="15487794" y="-203632"/>
+            <a:ext cx="2013058" cy="1006529"/>
+          </a:xfrm>
+          <a:custGeom>
+            <a:avLst/>
+            <a:gdLst/>
+            <a:ahLst/>
+            <a:cxnLst/>
+            <a:rect l="l" t="t" r="r" b="b"/>
+            <a:pathLst>
+              <a:path w="2013058" h="1006529">
+                <a:moveTo>
+                  <a:pt x="0" y="0"/>
+                </a:moveTo>
+                <a:lnTo>
+                  <a:pt x="2013058" y="0"/>
+                </a:lnTo>
+                <a:lnTo>
+                  <a:pt x="2013058" y="1006529"/>
+                </a:lnTo>
+                <a:lnTo>
+                  <a:pt x="0" y="1006529"/>
+                </a:lnTo>
+                <a:lnTo>
+                  <a:pt x="0" y="0"/>
+                </a:lnTo>
+                <a:close/>
+              </a:path>
+            </a:pathLst>
+          </a:custGeom>
+          <a:blipFill>
+            <a:blip r:embed="rId4">
+              <a:extLst>
+                <a:ext uri="{96DAC541-7B7A-43D3-8B79-37D633B846F1}">
+                  <asvg:svgBlip xmlns:asvg="http://schemas.microsoft.com/office/drawing/2016/SVG/main" r:embed="rId5"/>
+                </a:ext>
+              </a:extLst>
+            </a:blip>
+            <a:stretch>
+              <a:fillRect/>
+            </a:stretch>
+          </a:blipFill>
+        </p:spPr>
+      </p:sp>
+      <p:sp>
+        <p:nvSpPr>
+          <p:cNvPr id="11" name="Freeform 11"/>
+          <p:cNvSpPr/>
+          <p:nvPr/>
+        </p:nvSpPr>
+        <p:spPr>
+          <a:xfrm rot="-10800000">
+            <a:off x="16494323" y="802897"/>
+            <a:ext cx="2013058" cy="1006529"/>
+          </a:xfrm>
+          <a:custGeom>
+            <a:avLst/>
+            <a:gdLst/>
+            <a:ahLst/>
+            <a:cxnLst/>
+            <a:rect l="l" t="t" r="r" b="b"/>
+            <a:pathLst>
+              <a:path w="2013058" h="1006529">
+                <a:moveTo>
+                  <a:pt x="0" y="0"/>
+                </a:moveTo>
+                <a:lnTo>
+                  <a:pt x="2013058" y="0"/>
+                </a:lnTo>
+                <a:lnTo>
+                  <a:pt x="2013058" y="1006529"/>
+                </a:lnTo>
+                <a:lnTo>
+                  <a:pt x="0" y="1006529"/>
+                </a:lnTo>
+                <a:lnTo>
+                  <a:pt x="0" y="0"/>
+                </a:lnTo>
+                <a:close/>
+              </a:path>
+            </a:pathLst>
+          </a:custGeom>
+          <a:blipFill>
+            <a:blip r:embed="rId4">
+              <a:extLst>
+                <a:ext uri="{96DAC541-7B7A-43D3-8B79-37D633B846F1}">
+                  <asvg:svgBlip xmlns:asvg="http://schemas.microsoft.com/office/drawing/2016/SVG/main" r:embed="rId5"/>
+                </a:ext>
+              </a:extLst>
+            </a:blip>
+            <a:stretch>
+              <a:fillRect/>
+            </a:stretch>
+          </a:blipFill>
+        </p:spPr>
+      </p:sp>
+      <p:sp>
+        <p:nvSpPr>
+          <p:cNvPr id="12" name="Freeform 12"/>
+          <p:cNvSpPr/>
+          <p:nvPr/>
+        </p:nvSpPr>
+        <p:spPr>
+          <a:xfrm flipH="1" flipV="1">
+            <a:off x="17500852" y="2815955"/>
+            <a:ext cx="1006529" cy="1006529"/>
+          </a:xfrm>
+          <a:custGeom>
+            <a:avLst/>
+            <a:gdLst/>
+            <a:ahLst/>
+            <a:cxnLst/>
+            <a:rect l="l" t="t" r="r" b="b"/>
+            <a:pathLst>
+              <a:path w="1006529" h="1006529">
+                <a:moveTo>
+                  <a:pt x="1006529" y="1006529"/>
+                </a:moveTo>
+                <a:lnTo>
+                  <a:pt x="0" y="1006529"/>
+                </a:lnTo>
+                <a:lnTo>
+                  <a:pt x="0" y="0"/>
+                </a:lnTo>
+                <a:lnTo>
+                  <a:pt x="1006529" y="0"/>
+                </a:lnTo>
+                <a:lnTo>
+                  <a:pt x="1006529" y="1006529"/>
+                </a:lnTo>
+                <a:close/>
+              </a:path>
+            </a:pathLst>
+          </a:custGeom>
+          <a:blipFill>
+            <a:blip r:embed="rId2">
+              <a:extLst>
+                <a:ext uri="{96DAC541-7B7A-43D3-8B79-37D633B846F1}">
+                  <asvg:svgBlip xmlns:asvg="http://schemas.microsoft.com/office/drawing/2016/SVG/main" r:embed="rId3"/>
+                </a:ext>
+              </a:extLst>
+            </a:blip>
+            <a:stretch>
+              <a:fillRect/>
+            </a:stretch>
+          </a:blipFill>
+        </p:spPr>
+      </p:sp>
+      <p:sp>
+        <p:nvSpPr>
+          <p:cNvPr id="13" name="Freeform 13"/>
+          <p:cNvSpPr/>
+          <p:nvPr/>
+        </p:nvSpPr>
+        <p:spPr>
+          <a:xfrm>
+            <a:off x="16494323" y="1809426"/>
+            <a:ext cx="2013058" cy="1006529"/>
+          </a:xfrm>
+          <a:custGeom>
+            <a:avLst/>
+            <a:gdLst/>
+            <a:ahLst/>
+            <a:cxnLst/>
+            <a:rect l="l" t="t" r="r" b="b"/>
+            <a:pathLst>
+              <a:path w="2013058" h="1006529">
+                <a:moveTo>
+                  <a:pt x="0" y="0"/>
+                </a:moveTo>
+                <a:lnTo>
+                  <a:pt x="2013058" y="0"/>
+                </a:lnTo>
+                <a:lnTo>
+                  <a:pt x="2013058" y="1006529"/>
+                </a:lnTo>
+                <a:lnTo>
+                  <a:pt x="0" y="1006529"/>
+                </a:lnTo>
+                <a:lnTo>
+                  <a:pt x="0" y="0"/>
+                </a:lnTo>
+                <a:close/>
+              </a:path>
+            </a:pathLst>
+          </a:custGeom>
+          <a:blipFill>
+            <a:blip r:embed="rId4">
+              <a:extLst>
+                <a:ext uri="{96DAC541-7B7A-43D3-8B79-37D633B846F1}">
+                  <asvg:svgBlip xmlns:asvg="http://schemas.microsoft.com/office/drawing/2016/SVG/main" r:embed="rId5"/>
+                </a:ext>
+              </a:extLst>
+            </a:blip>
+            <a:stretch>
+              <a:fillRect/>
+            </a:stretch>
+          </a:blipFill>
+        </p:spPr>
+      </p:sp>
+      <p:sp>
+        <p:nvSpPr>
+          <p:cNvPr id="14" name="Freeform 14"/>
+          <p:cNvSpPr/>
+          <p:nvPr/>
+        </p:nvSpPr>
+        <p:spPr>
+          <a:xfrm rot="-10800000" flipV="1">
+            <a:off x="16494323" y="2815955"/>
+            <a:ext cx="1006529" cy="1006529"/>
+          </a:xfrm>
+          <a:custGeom>
+            <a:avLst/>
+            <a:gdLst/>
+            <a:ahLst/>
+            <a:cxnLst/>
+            <a:rect l="l" t="t" r="r" b="b"/>
+            <a:pathLst>
+              <a:path w="1006529" h="1006529">
+                <a:moveTo>
+                  <a:pt x="0" y="1006529"/>
+                </a:moveTo>
+                <a:lnTo>
+                  <a:pt x="1006529" y="1006529"/>
+                </a:lnTo>
+                <a:lnTo>
+                  <a:pt x="1006529" y="0"/>
+                </a:lnTo>
+                <a:lnTo>
+                  <a:pt x="0" y="0"/>
+                </a:lnTo>
+                <a:lnTo>
+                  <a:pt x="0" y="1006529"/>
+                </a:lnTo>
+                <a:close/>
+              </a:path>
+            </a:pathLst>
+          </a:custGeom>
+          <a:blipFill>
+            <a:blip r:embed="rId2">
+              <a:extLst>
+                <a:ext uri="{96DAC541-7B7A-43D3-8B79-37D633B846F1}">
+                  <asvg:svgBlip xmlns:asvg="http://schemas.microsoft.com/office/drawing/2016/SVG/main" r:embed="rId3"/>
+                </a:ext>
+              </a:extLst>
+            </a:blip>
+            <a:stretch>
+              <a:fillRect/>
+            </a:stretch>
+          </a:blipFill>
+        </p:spPr>
+      </p:sp>
+      <p:sp>
+        <p:nvSpPr>
+          <p:cNvPr id="15" name="Freeform 15"/>
+          <p:cNvSpPr/>
+          <p:nvPr/>
+        </p:nvSpPr>
+        <p:spPr>
+          <a:xfrm flipV="1">
+            <a:off x="16494323" y="3822484"/>
+            <a:ext cx="2013058" cy="1006529"/>
+          </a:xfrm>
+          <a:custGeom>
+            <a:avLst/>
+            <a:gdLst/>
+            <a:ahLst/>
+            <a:cxnLst/>
+            <a:rect l="l" t="t" r="r" b="b"/>
+            <a:pathLst>
+              <a:path w="2013058" h="1006529">
+                <a:moveTo>
+                  <a:pt x="0" y="1006529"/>
+                </a:moveTo>
+                <a:lnTo>
+                  <a:pt x="2013058" y="1006529"/>
+                </a:lnTo>
+                <a:lnTo>
+                  <a:pt x="2013058" y="0"/>
+                </a:lnTo>
+                <a:lnTo>
+                  <a:pt x="0" y="0"/>
+                </a:lnTo>
+                <a:lnTo>
+                  <a:pt x="0" y="1006529"/>
+                </a:lnTo>
+                <a:close/>
+              </a:path>
+            </a:pathLst>
+          </a:custGeom>
+          <a:blipFill>
+            <a:blip r:embed="rId4">
+              <a:extLst>
+                <a:ext uri="{96DAC541-7B7A-43D3-8B79-37D633B846F1}">
+                  <asvg:svgBlip xmlns:asvg="http://schemas.microsoft.com/office/drawing/2016/SVG/main" r:embed="rId5"/>
+                </a:ext>
+              </a:extLst>
+            </a:blip>
+            <a:stretch>
+              <a:fillRect/>
+            </a:stretch>
+          </a:blipFill>
+        </p:spPr>
+      </p:sp>
+      <p:sp>
+        <p:nvSpPr>
+          <p:cNvPr id="16" name="Freeform 16"/>
+          <p:cNvSpPr/>
+          <p:nvPr/>
+        </p:nvSpPr>
+        <p:spPr>
+          <a:xfrm>
+            <a:off x="1841752" y="8492855"/>
+            <a:ext cx="1006529" cy="1006529"/>
+          </a:xfrm>
+          <a:custGeom>
+            <a:avLst/>
+            <a:gdLst/>
+            <a:ahLst/>
+            <a:cxnLst/>
+            <a:rect l="l" t="t" r="r" b="b"/>
+            <a:pathLst>
+              <a:path w="1006529" h="1006529">
+                <a:moveTo>
+                  <a:pt x="0" y="0"/>
+                </a:moveTo>
+                <a:lnTo>
+                  <a:pt x="1006529" y="0"/>
+                </a:lnTo>
+                <a:lnTo>
+                  <a:pt x="1006529" y="1006529"/>
+                </a:lnTo>
+                <a:lnTo>
+                  <a:pt x="0" y="1006529"/>
+                </a:lnTo>
+                <a:lnTo>
+                  <a:pt x="0" y="0"/>
+                </a:lnTo>
+                <a:close/>
+              </a:path>
+            </a:pathLst>
+          </a:custGeom>
+          <a:blipFill>
+            <a:blip r:embed="rId2">
+              <a:extLst>
+                <a:ext uri="{96DAC541-7B7A-43D3-8B79-37D633B846F1}">
+                  <asvg:svgBlip xmlns:asvg="http://schemas.microsoft.com/office/drawing/2016/SVG/main" r:embed="rId3"/>
+                </a:ext>
+              </a:extLst>
+            </a:blip>
+            <a:stretch>
+              <a:fillRect/>
+            </a:stretch>
+          </a:blipFill>
+        </p:spPr>
+      </p:sp>
+      <p:sp>
+        <p:nvSpPr>
+          <p:cNvPr id="17" name="Freeform 17"/>
+          <p:cNvSpPr/>
+          <p:nvPr/>
+        </p:nvSpPr>
+        <p:spPr>
+          <a:xfrm flipH="1" flipV="1">
+            <a:off x="15487794" y="802897"/>
+            <a:ext cx="1006529" cy="1006529"/>
+          </a:xfrm>
+          <a:custGeom>
+            <a:avLst/>
+            <a:gdLst/>
+            <a:ahLst/>
+            <a:cxnLst/>
+            <a:rect l="l" t="t" r="r" b="b"/>
+            <a:pathLst>
+              <a:path w="1006529" h="1006529">
+                <a:moveTo>
+                  <a:pt x="1006529" y="1006529"/>
+                </a:moveTo>
+                <a:lnTo>
+                  <a:pt x="0" y="1006529"/>
+                </a:lnTo>
+                <a:lnTo>
+                  <a:pt x="0" y="0"/>
+                </a:lnTo>
+                <a:lnTo>
+                  <a:pt x="1006529" y="0"/>
+                </a:lnTo>
+                <a:lnTo>
+                  <a:pt x="1006529" y="1006529"/>
+                </a:lnTo>
+                <a:close/>
+              </a:path>
+            </a:pathLst>
+          </a:custGeom>
+          <a:blipFill>
+            <a:blip r:embed="rId2">
+              <a:extLst>
+                <a:ext uri="{96DAC541-7B7A-43D3-8B79-37D633B846F1}">
+                  <asvg:svgBlip xmlns:asvg="http://schemas.microsoft.com/office/drawing/2016/SVG/main" r:embed="rId3"/>
+                </a:ext>
+              </a:extLst>
+            </a:blip>
+            <a:stretch>
+              <a:fillRect/>
+            </a:stretch>
+          </a:blipFill>
+        </p:spPr>
+      </p:sp>
+      <p:sp>
+        <p:nvSpPr>
+          <p:cNvPr id="18" name="Freeform 18"/>
+          <p:cNvSpPr/>
+          <p:nvPr/>
+        </p:nvSpPr>
+        <p:spPr>
+          <a:xfrm rot="-10800000" flipH="1">
+            <a:off x="1841752" y="7486326"/>
+            <a:ext cx="1006529" cy="1006529"/>
+          </a:xfrm>
+          <a:custGeom>
+            <a:avLst/>
+            <a:gdLst/>
+            <a:ahLst/>
+            <a:cxnLst/>
+            <a:rect l="l" t="t" r="r" b="b"/>
+            <a:pathLst>
+              <a:path w="1006529" h="1006529">
+                <a:moveTo>
+                  <a:pt x="1006529" y="0"/>
+                </a:moveTo>
+                <a:lnTo>
+                  <a:pt x="0" y="0"/>
+                </a:lnTo>
+                <a:lnTo>
+                  <a:pt x="0" y="1006529"/>
+                </a:lnTo>
+                <a:lnTo>
+                  <a:pt x="1006529" y="1006529"/>
+                </a:lnTo>
+                <a:lnTo>
+                  <a:pt x="1006529" y="0"/>
+                </a:lnTo>
+                <a:close/>
+              </a:path>
+            </a:pathLst>
+          </a:custGeom>
+          <a:blipFill>
+            <a:blip r:embed="rId2">
+              <a:extLst>
+                <a:ext uri="{96DAC541-7B7A-43D3-8B79-37D633B846F1}">
+                  <asvg:svgBlip xmlns:asvg="http://schemas.microsoft.com/office/drawing/2016/SVG/main" r:embed="rId3"/>
+                </a:ext>
+              </a:extLst>
+            </a:blip>
+            <a:stretch>
+              <a:fillRect/>
+            </a:stretch>
+          </a:blipFill>
+        </p:spPr>
+      </p:sp>
+      <p:sp>
+        <p:nvSpPr>
+          <p:cNvPr id="19" name="Freeform 19"/>
+          <p:cNvSpPr/>
+          <p:nvPr/>
+        </p:nvSpPr>
+        <p:spPr>
+          <a:xfrm rot="-10800000" flipV="1">
+            <a:off x="15487794" y="1809426"/>
+            <a:ext cx="1006529" cy="1006529"/>
+          </a:xfrm>
+          <a:custGeom>
+            <a:avLst/>
+            <a:gdLst/>
+            <a:ahLst/>
+            <a:cxnLst/>
+            <a:rect l="l" t="t" r="r" b="b"/>
+            <a:pathLst>
+              <a:path w="1006529" h="1006529">
+                <a:moveTo>
+                  <a:pt x="0" y="1006529"/>
+                </a:moveTo>
+                <a:lnTo>
+                  <a:pt x="1006529" y="1006529"/>
+                </a:lnTo>
+                <a:lnTo>
+                  <a:pt x="1006529" y="0"/>
+                </a:lnTo>
+                <a:lnTo>
+                  <a:pt x="0" y="0"/>
+                </a:lnTo>
+                <a:lnTo>
+                  <a:pt x="0" y="1006529"/>
+                </a:lnTo>
+                <a:close/>
+              </a:path>
+            </a:pathLst>
+          </a:custGeom>
+          <a:blipFill>
+            <a:blip r:embed="rId2">
+              <a:extLst>
+                <a:ext uri="{96DAC541-7B7A-43D3-8B79-37D633B846F1}">
+                  <asvg:svgBlip xmlns:asvg="http://schemas.microsoft.com/office/drawing/2016/SVG/main" r:embed="rId3"/>
+                </a:ext>
+              </a:extLst>
+            </a:blip>
+            <a:stretch>
+              <a:fillRect/>
+            </a:stretch>
+          </a:blipFill>
+        </p:spPr>
+      </p:sp>
+      <p:sp>
+        <p:nvSpPr>
+          <p:cNvPr id="20" name="TextBox 20"/>
+          <p:cNvSpPr txBox="1"/>
+          <p:nvPr/>
+        </p:nvSpPr>
+        <p:spPr>
+          <a:xfrm>
+            <a:off x="4564028" y="1025322"/>
+            <a:ext cx="9159943" cy="1790632"/>
+          </a:xfrm>
+          <a:prstGeom prst="rect">
+            <a:avLst/>
+          </a:prstGeom>
+        </p:spPr>
+        <p:txBody>
+          <a:bodyPr lIns="0" tIns="0" rIns="0" bIns="0" rtlCol="0" anchor="t">
+            <a:spAutoFit/>
+          </a:bodyPr>
+          <a:lstStyle/>
+          <a:p>
+            <a:pPr algn="l">
+              <a:lnSpc>
+                <a:spcPts val="10842"/>
+              </a:lnSpc>
+            </a:pPr>
+            <a:r>
+              <a:rPr lang="en-US" sz="13222" dirty="0">
+                <a:solidFill>
+                  <a:srgbClr val="262F43"/>
+                </a:solidFill>
+                <a:latin typeface="Impact"/>
+                <a:ea typeface="Impact"/>
+                <a:cs typeface="Impact"/>
+                <a:sym typeface="Impact"/>
+              </a:rPr>
+              <a:t>CONTENTS</a:t>
+            </a:r>
+          </a:p>
+        </p:txBody>
+      </p:sp>
+      <p:sp>
+        <p:nvSpPr>
+          <p:cNvPr id="21" name="TextBox 21"/>
+          <p:cNvSpPr txBox="1"/>
+          <p:nvPr/>
+        </p:nvSpPr>
+        <p:spPr>
+          <a:xfrm>
+            <a:off x="3989153" y="2463113"/>
+            <a:ext cx="10309692" cy="7679410"/>
+          </a:xfrm>
+          <a:prstGeom prst="rect">
+            <a:avLst/>
+          </a:prstGeom>
+        </p:spPr>
+        <p:txBody>
+          <a:bodyPr lIns="0" tIns="0" rIns="0" bIns="0" rtlCol="0" anchor="t">
+            <a:spAutoFit/>
+          </a:bodyPr>
+          <a:lstStyle/>
+          <a:p>
+            <a:pPr algn="l">
+              <a:lnSpc>
+                <a:spcPts val="4349"/>
+              </a:lnSpc>
+            </a:pPr>
+            <a:r>
+              <a:rPr lang="en-US" sz="3106" dirty="0">
+                <a:solidFill>
+                  <a:srgbClr val="262F43"/>
+                </a:solidFill>
+                <a:latin typeface="Clear Sans"/>
+                <a:ea typeface="Clear Sans"/>
+                <a:cs typeface="Clear Sans"/>
+                <a:sym typeface="Clear Sans"/>
+              </a:rPr>
+              <a:t> 1. Introduction</a:t>
+            </a:r>
+          </a:p>
+          <a:p>
+            <a:pPr algn="l">
+              <a:lnSpc>
+                <a:spcPts val="4349"/>
+              </a:lnSpc>
+            </a:pPr>
+            <a:r>
+              <a:rPr lang="en-US" sz="3106" dirty="0">
+                <a:solidFill>
+                  <a:srgbClr val="262F43"/>
+                </a:solidFill>
+                <a:latin typeface="Clear Sans"/>
+                <a:ea typeface="Clear Sans"/>
+                <a:cs typeface="Clear Sans"/>
+                <a:sym typeface="Clear Sans"/>
+              </a:rPr>
+              <a:t> 2. Limitations of Manual Surveillance</a:t>
+            </a:r>
+          </a:p>
+          <a:p>
+            <a:pPr algn="l">
+              <a:lnSpc>
+                <a:spcPts val="4349"/>
+              </a:lnSpc>
+            </a:pPr>
+            <a:r>
+              <a:rPr lang="en-US" sz="3106" dirty="0">
+                <a:solidFill>
+                  <a:srgbClr val="262F43"/>
+                </a:solidFill>
+                <a:latin typeface="Clear Sans"/>
+                <a:ea typeface="Clear Sans"/>
+                <a:cs typeface="Clear Sans"/>
+                <a:sym typeface="Clear Sans"/>
+              </a:rPr>
+              <a:t> 3. Automation as a Solution</a:t>
+            </a:r>
+          </a:p>
+          <a:p>
+            <a:pPr algn="l">
+              <a:lnSpc>
+                <a:spcPts val="4349"/>
+              </a:lnSpc>
+            </a:pPr>
+            <a:r>
+              <a:rPr lang="en-US" sz="3106" dirty="0">
+                <a:solidFill>
+                  <a:srgbClr val="262F43"/>
+                </a:solidFill>
+                <a:latin typeface="Clear Sans"/>
+                <a:ea typeface="Clear Sans"/>
+                <a:cs typeface="Clear Sans"/>
+                <a:sym typeface="Clear Sans"/>
+              </a:rPr>
+              <a:t> 4. Research Motivation</a:t>
+            </a:r>
+          </a:p>
+          <a:p>
+            <a:pPr algn="l">
+              <a:lnSpc>
+                <a:spcPts val="4349"/>
+              </a:lnSpc>
+            </a:pPr>
+            <a:r>
+              <a:rPr lang="en-US" sz="3106" dirty="0">
+                <a:solidFill>
+                  <a:srgbClr val="262F43"/>
+                </a:solidFill>
+                <a:latin typeface="Clear Sans"/>
+                <a:ea typeface="Clear Sans"/>
+                <a:cs typeface="Clear Sans"/>
+                <a:sym typeface="Clear Sans"/>
+              </a:rPr>
+              <a:t> 5. Problem Statement</a:t>
+            </a:r>
+          </a:p>
+          <a:p>
+            <a:pPr algn="l">
+              <a:lnSpc>
+                <a:spcPts val="4349"/>
+              </a:lnSpc>
+            </a:pPr>
+            <a:r>
+              <a:rPr lang="en-US" sz="3106" dirty="0">
+                <a:solidFill>
+                  <a:srgbClr val="262F43"/>
+                </a:solidFill>
+                <a:latin typeface="Clear Sans"/>
+                <a:ea typeface="Clear Sans"/>
+                <a:cs typeface="Clear Sans"/>
+                <a:sym typeface="Clear Sans"/>
+              </a:rPr>
+              <a:t> 6. Related Work</a:t>
+            </a:r>
+          </a:p>
+          <a:p>
+            <a:pPr algn="l">
+              <a:lnSpc>
+                <a:spcPts val="4349"/>
+              </a:lnSpc>
+            </a:pPr>
+            <a:r>
+              <a:rPr lang="en-US" sz="3106" dirty="0">
+                <a:solidFill>
+                  <a:srgbClr val="262F43"/>
+                </a:solidFill>
+                <a:latin typeface="Clear Sans"/>
+                <a:ea typeface="Clear Sans"/>
+                <a:cs typeface="Clear Sans"/>
+                <a:sym typeface="Clear Sans"/>
+              </a:rPr>
+              <a:t> 7. Proposed System</a:t>
+            </a:r>
+          </a:p>
+          <a:p>
+            <a:pPr algn="l">
+              <a:lnSpc>
+                <a:spcPts val="4349"/>
+              </a:lnSpc>
+            </a:pPr>
+            <a:r>
+              <a:rPr lang="en-US" sz="3106" dirty="0">
+                <a:solidFill>
+                  <a:srgbClr val="262F43"/>
+                </a:solidFill>
+                <a:latin typeface="Clear Sans"/>
+                <a:ea typeface="Clear Sans"/>
+                <a:cs typeface="Clear Sans"/>
+                <a:sym typeface="Clear Sans"/>
+              </a:rPr>
+              <a:t> 8. Architecture of Proposed System</a:t>
+            </a:r>
+          </a:p>
+          <a:p>
+            <a:pPr algn="l">
+              <a:lnSpc>
+                <a:spcPts val="4349"/>
+              </a:lnSpc>
+            </a:pPr>
+            <a:r>
+              <a:rPr lang="en-US" sz="3106" dirty="0">
+                <a:solidFill>
+                  <a:srgbClr val="262F43"/>
+                </a:solidFill>
+                <a:latin typeface="Clear Sans"/>
+                <a:ea typeface="Clear Sans"/>
+                <a:cs typeface="Clear Sans"/>
+                <a:sym typeface="Clear Sans"/>
+              </a:rPr>
+              <a:t> 9. Features Of Proposed System</a:t>
+            </a:r>
+          </a:p>
+          <a:p>
+            <a:pPr algn="l">
+              <a:lnSpc>
+                <a:spcPts val="4349"/>
+              </a:lnSpc>
+            </a:pPr>
+            <a:r>
+              <a:rPr lang="en-US" sz="3106" dirty="0">
+                <a:solidFill>
+                  <a:srgbClr val="262F43"/>
+                </a:solidFill>
+                <a:latin typeface="Clear Sans"/>
+                <a:ea typeface="Clear Sans"/>
+                <a:cs typeface="Clear Sans"/>
+                <a:sym typeface="Clear Sans"/>
+              </a:rPr>
+              <a:t>10.Dataset and Experimental Setup</a:t>
+            </a:r>
+          </a:p>
+          <a:p>
+            <a:pPr algn="l">
+              <a:lnSpc>
+                <a:spcPts val="4349"/>
+              </a:lnSpc>
+            </a:pPr>
+            <a:r>
+              <a:rPr lang="en-US" sz="3106" dirty="0">
+                <a:solidFill>
+                  <a:srgbClr val="262F43"/>
+                </a:solidFill>
+                <a:latin typeface="Clear Sans"/>
+                <a:ea typeface="Clear Sans"/>
+                <a:cs typeface="Clear Sans"/>
+                <a:sym typeface="Clear Sans"/>
+              </a:rPr>
+              <a:t>11.Results</a:t>
+            </a:r>
+          </a:p>
+          <a:p>
+            <a:pPr algn="l">
+              <a:lnSpc>
+                <a:spcPts val="4349"/>
+              </a:lnSpc>
+            </a:pPr>
+            <a:r>
+              <a:rPr lang="en-US" sz="3106" dirty="0">
+                <a:solidFill>
+                  <a:srgbClr val="262F43"/>
+                </a:solidFill>
+                <a:latin typeface="Clear Sans"/>
+                <a:ea typeface="Clear Sans"/>
+                <a:cs typeface="Clear Sans"/>
+                <a:sym typeface="Clear Sans"/>
+              </a:rPr>
+              <a:t>12. Project Outcome</a:t>
+            </a:r>
+          </a:p>
+          <a:p>
+            <a:pPr algn="l">
+              <a:lnSpc>
+                <a:spcPts val="4349"/>
+              </a:lnSpc>
+            </a:pPr>
+            <a:r>
+              <a:rPr lang="en-US" sz="3106" dirty="0">
+                <a:solidFill>
+                  <a:srgbClr val="262F43"/>
+                </a:solidFill>
+                <a:latin typeface="Clear Sans"/>
+                <a:ea typeface="Clear Sans"/>
+                <a:cs typeface="Clear Sans"/>
+                <a:sym typeface="Clear Sans"/>
+              </a:rPr>
+              <a:t>13.Conclusion</a:t>
+            </a:r>
+          </a:p>
+          <a:p>
+            <a:pPr algn="l">
+              <a:lnSpc>
+                <a:spcPts val="4349"/>
+              </a:lnSpc>
+            </a:pPr>
+            <a:r>
+              <a:rPr lang="en-US" sz="3106" dirty="0">
+                <a:solidFill>
+                  <a:srgbClr val="262F43"/>
+                </a:solidFill>
+                <a:latin typeface="Clear Sans"/>
+                <a:ea typeface="Clear Sans"/>
+                <a:cs typeface="Clear Sans"/>
+                <a:sym typeface="Clear Sans"/>
+              </a:rPr>
+              <a:t>14.Future Scope</a:t>
+            </a:r>
+          </a:p>
+        </p:txBody>
+      </p:sp>
+    </p:spTree>
+  </p:cSld>
+  <p:clrMapOvr>
+    <a:masterClrMapping/>
+  </p:clrMapOvr>
+</p:sld>
+</file>
+
+<file path=ppt/slides/slide20.xml><?xml version="1.0" encoding="utf-8"?>
 <p:sld xmlns:a="http://schemas.openxmlformats.org/drawingml/2006/main" xmlns:r="http://schemas.openxmlformats.org/officeDocument/2006/relationships" xmlns:p="http://schemas.openxmlformats.org/presentationml/2006/main">
   <p:cSld>
     <p:bg>
@@ -16044,1286 +18603,7 @@
 </p:sld>
 </file>
 
-<file path=ppt/slides/slide2.xml><?xml version="1.0" encoding="utf-8"?>
-<p:sld xmlns:a="http://schemas.openxmlformats.org/drawingml/2006/main" xmlns:r="http://schemas.openxmlformats.org/officeDocument/2006/relationships" xmlns:p="http://schemas.openxmlformats.org/presentationml/2006/main">
-  <p:cSld>
-    <p:bg>
-      <p:bgPr>
-        <a:solidFill>
-          <a:srgbClr val="E0FAFF"/>
-        </a:solidFill>
-        <a:effectLst/>
-      </p:bgPr>
-    </p:bg>
-    <p:spTree>
-      <p:nvGrpSpPr>
-        <p:cNvPr id="1" name=""/>
-        <p:cNvGrpSpPr/>
-        <p:nvPr/>
-      </p:nvGrpSpPr>
-      <p:grpSpPr>
-        <a:xfrm>
-          <a:off x="0" y="0"/>
-          <a:ext cx="0" cy="0"/>
-          <a:chOff x="0" y="0"/>
-          <a:chExt cx="0" cy="0"/>
-        </a:xfrm>
-      </p:grpSpPr>
-      <p:sp>
-        <p:nvSpPr>
-          <p:cNvPr id="2" name="Freeform 2"/>
-          <p:cNvSpPr/>
-          <p:nvPr/>
-        </p:nvSpPr>
-        <p:spPr>
-          <a:xfrm flipH="1" flipV="1">
-            <a:off x="-171306" y="9499384"/>
-            <a:ext cx="1006529" cy="1006529"/>
-          </a:xfrm>
-          <a:custGeom>
-            <a:avLst/>
-            <a:gdLst/>
-            <a:ahLst/>
-            <a:cxnLst/>
-            <a:rect l="l" t="t" r="r" b="b"/>
-            <a:pathLst>
-              <a:path w="1006529" h="1006529">
-                <a:moveTo>
-                  <a:pt x="1006529" y="1006529"/>
-                </a:moveTo>
-                <a:lnTo>
-                  <a:pt x="0" y="1006529"/>
-                </a:lnTo>
-                <a:lnTo>
-                  <a:pt x="0" y="0"/>
-                </a:lnTo>
-                <a:lnTo>
-                  <a:pt x="1006529" y="0"/>
-                </a:lnTo>
-                <a:lnTo>
-                  <a:pt x="1006529" y="1006529"/>
-                </a:lnTo>
-                <a:close/>
-              </a:path>
-            </a:pathLst>
-          </a:custGeom>
-          <a:blipFill>
-            <a:blip r:embed="rId2">
-              <a:extLst>
-                <a:ext uri="{96DAC541-7B7A-43D3-8B79-37D633B846F1}">
-                  <asvg:svgBlip xmlns:asvg="http://schemas.microsoft.com/office/drawing/2016/SVG/main" r:embed="rId3"/>
-                </a:ext>
-              </a:extLst>
-            </a:blip>
-            <a:stretch>
-              <a:fillRect/>
-            </a:stretch>
-          </a:blipFill>
-        </p:spPr>
-      </p:sp>
-      <p:sp>
-        <p:nvSpPr>
-          <p:cNvPr id="3" name="Freeform 3"/>
-          <p:cNvSpPr/>
-          <p:nvPr/>
-        </p:nvSpPr>
-        <p:spPr>
-          <a:xfrm>
-            <a:off x="835223" y="9499384"/>
-            <a:ext cx="2013058" cy="1006529"/>
-          </a:xfrm>
-          <a:custGeom>
-            <a:avLst/>
-            <a:gdLst/>
-            <a:ahLst/>
-            <a:cxnLst/>
-            <a:rect l="l" t="t" r="r" b="b"/>
-            <a:pathLst>
-              <a:path w="2013058" h="1006529">
-                <a:moveTo>
-                  <a:pt x="0" y="0"/>
-                </a:moveTo>
-                <a:lnTo>
-                  <a:pt x="2013058" y="0"/>
-                </a:lnTo>
-                <a:lnTo>
-                  <a:pt x="2013058" y="1006529"/>
-                </a:lnTo>
-                <a:lnTo>
-                  <a:pt x="0" y="1006529"/>
-                </a:lnTo>
-                <a:lnTo>
-                  <a:pt x="0" y="0"/>
-                </a:lnTo>
-                <a:close/>
-              </a:path>
-            </a:pathLst>
-          </a:custGeom>
-          <a:blipFill>
-            <a:blip r:embed="rId4">
-              <a:extLst>
-                <a:ext uri="{96DAC541-7B7A-43D3-8B79-37D633B846F1}">
-                  <asvg:svgBlip xmlns:asvg="http://schemas.microsoft.com/office/drawing/2016/SVG/main" r:embed="rId5"/>
-                </a:ext>
-              </a:extLst>
-            </a:blip>
-            <a:stretch>
-              <a:fillRect/>
-            </a:stretch>
-          </a:blipFill>
-        </p:spPr>
-      </p:sp>
-      <p:sp>
-        <p:nvSpPr>
-          <p:cNvPr id="4" name="Freeform 4"/>
-          <p:cNvSpPr/>
-          <p:nvPr/>
-        </p:nvSpPr>
-        <p:spPr>
-          <a:xfrm>
-            <a:off x="-171306" y="8492855"/>
-            <a:ext cx="2013058" cy="1006529"/>
-          </a:xfrm>
-          <a:custGeom>
-            <a:avLst/>
-            <a:gdLst/>
-            <a:ahLst/>
-            <a:cxnLst/>
-            <a:rect l="l" t="t" r="r" b="b"/>
-            <a:pathLst>
-              <a:path w="2013058" h="1006529">
-                <a:moveTo>
-                  <a:pt x="0" y="0"/>
-                </a:moveTo>
-                <a:lnTo>
-                  <a:pt x="2013058" y="0"/>
-                </a:lnTo>
-                <a:lnTo>
-                  <a:pt x="2013058" y="1006529"/>
-                </a:lnTo>
-                <a:lnTo>
-                  <a:pt x="0" y="1006529"/>
-                </a:lnTo>
-                <a:lnTo>
-                  <a:pt x="0" y="0"/>
-                </a:lnTo>
-                <a:close/>
-              </a:path>
-            </a:pathLst>
-          </a:custGeom>
-          <a:blipFill>
-            <a:blip r:embed="rId4">
-              <a:extLst>
-                <a:ext uri="{96DAC541-7B7A-43D3-8B79-37D633B846F1}">
-                  <asvg:svgBlip xmlns:asvg="http://schemas.microsoft.com/office/drawing/2016/SVG/main" r:embed="rId5"/>
-                </a:ext>
-              </a:extLst>
-            </a:blip>
-            <a:stretch>
-              <a:fillRect/>
-            </a:stretch>
-          </a:blipFill>
-        </p:spPr>
-      </p:sp>
-      <p:sp>
-        <p:nvSpPr>
-          <p:cNvPr id="5" name="Freeform 5"/>
-          <p:cNvSpPr/>
-          <p:nvPr/>
-        </p:nvSpPr>
-        <p:spPr>
-          <a:xfrm rot="-10800000" flipH="1" flipV="1">
-            <a:off x="-171306" y="6479797"/>
-            <a:ext cx="1006529" cy="1006529"/>
-          </a:xfrm>
-          <a:custGeom>
-            <a:avLst/>
-            <a:gdLst/>
-            <a:ahLst/>
-            <a:cxnLst/>
-            <a:rect l="l" t="t" r="r" b="b"/>
-            <a:pathLst>
-              <a:path w="1006529" h="1006529">
-                <a:moveTo>
-                  <a:pt x="1006529" y="1006529"/>
-                </a:moveTo>
-                <a:lnTo>
-                  <a:pt x="0" y="1006529"/>
-                </a:lnTo>
-                <a:lnTo>
-                  <a:pt x="0" y="0"/>
-                </a:lnTo>
-                <a:lnTo>
-                  <a:pt x="1006529" y="0"/>
-                </a:lnTo>
-                <a:lnTo>
-                  <a:pt x="1006529" y="1006529"/>
-                </a:lnTo>
-                <a:close/>
-              </a:path>
-            </a:pathLst>
-          </a:custGeom>
-          <a:blipFill>
-            <a:blip r:embed="rId2">
-              <a:extLst>
-                <a:ext uri="{96DAC541-7B7A-43D3-8B79-37D633B846F1}">
-                  <asvg:svgBlip xmlns:asvg="http://schemas.microsoft.com/office/drawing/2016/SVG/main" r:embed="rId3"/>
-                </a:ext>
-              </a:extLst>
-            </a:blip>
-            <a:stretch>
-              <a:fillRect/>
-            </a:stretch>
-          </a:blipFill>
-        </p:spPr>
-      </p:sp>
-      <p:sp>
-        <p:nvSpPr>
-          <p:cNvPr id="6" name="Freeform 6"/>
-          <p:cNvSpPr/>
-          <p:nvPr/>
-        </p:nvSpPr>
-        <p:spPr>
-          <a:xfrm rot="-10800000">
-            <a:off x="-171306" y="7486326"/>
-            <a:ext cx="2013058" cy="1006529"/>
-          </a:xfrm>
-          <a:custGeom>
-            <a:avLst/>
-            <a:gdLst/>
-            <a:ahLst/>
-            <a:cxnLst/>
-            <a:rect l="l" t="t" r="r" b="b"/>
-            <a:pathLst>
-              <a:path w="2013058" h="1006529">
-                <a:moveTo>
-                  <a:pt x="0" y="0"/>
-                </a:moveTo>
-                <a:lnTo>
-                  <a:pt x="2013058" y="0"/>
-                </a:lnTo>
-                <a:lnTo>
-                  <a:pt x="2013058" y="1006529"/>
-                </a:lnTo>
-                <a:lnTo>
-                  <a:pt x="0" y="1006529"/>
-                </a:lnTo>
-                <a:lnTo>
-                  <a:pt x="0" y="0"/>
-                </a:lnTo>
-                <a:close/>
-              </a:path>
-            </a:pathLst>
-          </a:custGeom>
-          <a:blipFill>
-            <a:blip r:embed="rId4">
-              <a:extLst>
-                <a:ext uri="{96DAC541-7B7A-43D3-8B79-37D633B846F1}">
-                  <asvg:svgBlip xmlns:asvg="http://schemas.microsoft.com/office/drawing/2016/SVG/main" r:embed="rId5"/>
-                </a:ext>
-              </a:extLst>
-            </a:blip>
-            <a:stretch>
-              <a:fillRect/>
-            </a:stretch>
-          </a:blipFill>
-        </p:spPr>
-      </p:sp>
-      <p:sp>
-        <p:nvSpPr>
-          <p:cNvPr id="7" name="Freeform 7"/>
-          <p:cNvSpPr/>
-          <p:nvPr/>
-        </p:nvSpPr>
-        <p:spPr>
-          <a:xfrm flipV="1">
-            <a:off x="835223" y="6479797"/>
-            <a:ext cx="1006529" cy="1006529"/>
-          </a:xfrm>
-          <a:custGeom>
-            <a:avLst/>
-            <a:gdLst/>
-            <a:ahLst/>
-            <a:cxnLst/>
-            <a:rect l="l" t="t" r="r" b="b"/>
-            <a:pathLst>
-              <a:path w="1006529" h="1006529">
-                <a:moveTo>
-                  <a:pt x="0" y="1006529"/>
-                </a:moveTo>
-                <a:lnTo>
-                  <a:pt x="1006529" y="1006529"/>
-                </a:lnTo>
-                <a:lnTo>
-                  <a:pt x="1006529" y="0"/>
-                </a:lnTo>
-                <a:lnTo>
-                  <a:pt x="0" y="0"/>
-                </a:lnTo>
-                <a:lnTo>
-                  <a:pt x="0" y="1006529"/>
-                </a:lnTo>
-                <a:close/>
-              </a:path>
-            </a:pathLst>
-          </a:custGeom>
-          <a:blipFill>
-            <a:blip r:embed="rId2">
-              <a:extLst>
-                <a:ext uri="{96DAC541-7B7A-43D3-8B79-37D633B846F1}">
-                  <asvg:svgBlip xmlns:asvg="http://schemas.microsoft.com/office/drawing/2016/SVG/main" r:embed="rId3"/>
-                </a:ext>
-              </a:extLst>
-            </a:blip>
-            <a:stretch>
-              <a:fillRect/>
-            </a:stretch>
-          </a:blipFill>
-        </p:spPr>
-      </p:sp>
-      <p:sp>
-        <p:nvSpPr>
-          <p:cNvPr id="8" name="Freeform 8"/>
-          <p:cNvSpPr/>
-          <p:nvPr/>
-        </p:nvSpPr>
-        <p:spPr>
-          <a:xfrm rot="-10800000" flipV="1">
-            <a:off x="-171306" y="5473268"/>
-            <a:ext cx="2013058" cy="1006529"/>
-          </a:xfrm>
-          <a:custGeom>
-            <a:avLst/>
-            <a:gdLst/>
-            <a:ahLst/>
-            <a:cxnLst/>
-            <a:rect l="l" t="t" r="r" b="b"/>
-            <a:pathLst>
-              <a:path w="2013058" h="1006529">
-                <a:moveTo>
-                  <a:pt x="0" y="1006529"/>
-                </a:moveTo>
-                <a:lnTo>
-                  <a:pt x="2013058" y="1006529"/>
-                </a:lnTo>
-                <a:lnTo>
-                  <a:pt x="2013058" y="0"/>
-                </a:lnTo>
-                <a:lnTo>
-                  <a:pt x="0" y="0"/>
-                </a:lnTo>
-                <a:lnTo>
-                  <a:pt x="0" y="1006529"/>
-                </a:lnTo>
-                <a:close/>
-              </a:path>
-            </a:pathLst>
-          </a:custGeom>
-          <a:blipFill>
-            <a:blip r:embed="rId4">
-              <a:extLst>
-                <a:ext uri="{96DAC541-7B7A-43D3-8B79-37D633B846F1}">
-                  <asvg:svgBlip xmlns:asvg="http://schemas.microsoft.com/office/drawing/2016/SVG/main" r:embed="rId5"/>
-                </a:ext>
-              </a:extLst>
-            </a:blip>
-            <a:stretch>
-              <a:fillRect/>
-            </a:stretch>
-          </a:blipFill>
-        </p:spPr>
-      </p:sp>
-      <p:sp>
-        <p:nvSpPr>
-          <p:cNvPr id="9" name="Freeform 9"/>
-          <p:cNvSpPr/>
-          <p:nvPr/>
-        </p:nvSpPr>
-        <p:spPr>
-          <a:xfrm rot="-10800000" flipH="1" flipV="1">
-            <a:off x="17500852" y="-203632"/>
-            <a:ext cx="1006529" cy="1006529"/>
-          </a:xfrm>
-          <a:custGeom>
-            <a:avLst/>
-            <a:gdLst/>
-            <a:ahLst/>
-            <a:cxnLst/>
-            <a:rect l="l" t="t" r="r" b="b"/>
-            <a:pathLst>
-              <a:path w="1006529" h="1006529">
-                <a:moveTo>
-                  <a:pt x="1006529" y="1006529"/>
-                </a:moveTo>
-                <a:lnTo>
-                  <a:pt x="0" y="1006529"/>
-                </a:lnTo>
-                <a:lnTo>
-                  <a:pt x="0" y="0"/>
-                </a:lnTo>
-                <a:lnTo>
-                  <a:pt x="1006529" y="0"/>
-                </a:lnTo>
-                <a:lnTo>
-                  <a:pt x="1006529" y="1006529"/>
-                </a:lnTo>
-                <a:close/>
-              </a:path>
-            </a:pathLst>
-          </a:custGeom>
-          <a:blipFill>
-            <a:blip r:embed="rId2">
-              <a:extLst>
-                <a:ext uri="{96DAC541-7B7A-43D3-8B79-37D633B846F1}">
-                  <asvg:svgBlip xmlns:asvg="http://schemas.microsoft.com/office/drawing/2016/SVG/main" r:embed="rId3"/>
-                </a:ext>
-              </a:extLst>
-            </a:blip>
-            <a:stretch>
-              <a:fillRect/>
-            </a:stretch>
-          </a:blipFill>
-        </p:spPr>
-      </p:sp>
-      <p:sp>
-        <p:nvSpPr>
-          <p:cNvPr id="10" name="Freeform 10"/>
-          <p:cNvSpPr/>
-          <p:nvPr/>
-        </p:nvSpPr>
-        <p:spPr>
-          <a:xfrm rot="-10800000">
-            <a:off x="15487794" y="-203632"/>
-            <a:ext cx="2013058" cy="1006529"/>
-          </a:xfrm>
-          <a:custGeom>
-            <a:avLst/>
-            <a:gdLst/>
-            <a:ahLst/>
-            <a:cxnLst/>
-            <a:rect l="l" t="t" r="r" b="b"/>
-            <a:pathLst>
-              <a:path w="2013058" h="1006529">
-                <a:moveTo>
-                  <a:pt x="0" y="0"/>
-                </a:moveTo>
-                <a:lnTo>
-                  <a:pt x="2013058" y="0"/>
-                </a:lnTo>
-                <a:lnTo>
-                  <a:pt x="2013058" y="1006529"/>
-                </a:lnTo>
-                <a:lnTo>
-                  <a:pt x="0" y="1006529"/>
-                </a:lnTo>
-                <a:lnTo>
-                  <a:pt x="0" y="0"/>
-                </a:lnTo>
-                <a:close/>
-              </a:path>
-            </a:pathLst>
-          </a:custGeom>
-          <a:blipFill>
-            <a:blip r:embed="rId4">
-              <a:extLst>
-                <a:ext uri="{96DAC541-7B7A-43D3-8B79-37D633B846F1}">
-                  <asvg:svgBlip xmlns:asvg="http://schemas.microsoft.com/office/drawing/2016/SVG/main" r:embed="rId5"/>
-                </a:ext>
-              </a:extLst>
-            </a:blip>
-            <a:stretch>
-              <a:fillRect/>
-            </a:stretch>
-          </a:blipFill>
-        </p:spPr>
-      </p:sp>
-      <p:sp>
-        <p:nvSpPr>
-          <p:cNvPr id="11" name="Freeform 11"/>
-          <p:cNvSpPr/>
-          <p:nvPr/>
-        </p:nvSpPr>
-        <p:spPr>
-          <a:xfrm rot="-10800000">
-            <a:off x="16494323" y="802897"/>
-            <a:ext cx="2013058" cy="1006529"/>
-          </a:xfrm>
-          <a:custGeom>
-            <a:avLst/>
-            <a:gdLst/>
-            <a:ahLst/>
-            <a:cxnLst/>
-            <a:rect l="l" t="t" r="r" b="b"/>
-            <a:pathLst>
-              <a:path w="2013058" h="1006529">
-                <a:moveTo>
-                  <a:pt x="0" y="0"/>
-                </a:moveTo>
-                <a:lnTo>
-                  <a:pt x="2013058" y="0"/>
-                </a:lnTo>
-                <a:lnTo>
-                  <a:pt x="2013058" y="1006529"/>
-                </a:lnTo>
-                <a:lnTo>
-                  <a:pt x="0" y="1006529"/>
-                </a:lnTo>
-                <a:lnTo>
-                  <a:pt x="0" y="0"/>
-                </a:lnTo>
-                <a:close/>
-              </a:path>
-            </a:pathLst>
-          </a:custGeom>
-          <a:blipFill>
-            <a:blip r:embed="rId4">
-              <a:extLst>
-                <a:ext uri="{96DAC541-7B7A-43D3-8B79-37D633B846F1}">
-                  <asvg:svgBlip xmlns:asvg="http://schemas.microsoft.com/office/drawing/2016/SVG/main" r:embed="rId5"/>
-                </a:ext>
-              </a:extLst>
-            </a:blip>
-            <a:stretch>
-              <a:fillRect/>
-            </a:stretch>
-          </a:blipFill>
-        </p:spPr>
-      </p:sp>
-      <p:sp>
-        <p:nvSpPr>
-          <p:cNvPr id="12" name="Freeform 12"/>
-          <p:cNvSpPr/>
-          <p:nvPr/>
-        </p:nvSpPr>
-        <p:spPr>
-          <a:xfrm flipH="1" flipV="1">
-            <a:off x="17500852" y="2815955"/>
-            <a:ext cx="1006529" cy="1006529"/>
-          </a:xfrm>
-          <a:custGeom>
-            <a:avLst/>
-            <a:gdLst/>
-            <a:ahLst/>
-            <a:cxnLst/>
-            <a:rect l="l" t="t" r="r" b="b"/>
-            <a:pathLst>
-              <a:path w="1006529" h="1006529">
-                <a:moveTo>
-                  <a:pt x="1006529" y="1006529"/>
-                </a:moveTo>
-                <a:lnTo>
-                  <a:pt x="0" y="1006529"/>
-                </a:lnTo>
-                <a:lnTo>
-                  <a:pt x="0" y="0"/>
-                </a:lnTo>
-                <a:lnTo>
-                  <a:pt x="1006529" y="0"/>
-                </a:lnTo>
-                <a:lnTo>
-                  <a:pt x="1006529" y="1006529"/>
-                </a:lnTo>
-                <a:close/>
-              </a:path>
-            </a:pathLst>
-          </a:custGeom>
-          <a:blipFill>
-            <a:blip r:embed="rId2">
-              <a:extLst>
-                <a:ext uri="{96DAC541-7B7A-43D3-8B79-37D633B846F1}">
-                  <asvg:svgBlip xmlns:asvg="http://schemas.microsoft.com/office/drawing/2016/SVG/main" r:embed="rId3"/>
-                </a:ext>
-              </a:extLst>
-            </a:blip>
-            <a:stretch>
-              <a:fillRect/>
-            </a:stretch>
-          </a:blipFill>
-        </p:spPr>
-      </p:sp>
-      <p:sp>
-        <p:nvSpPr>
-          <p:cNvPr id="13" name="Freeform 13"/>
-          <p:cNvSpPr/>
-          <p:nvPr/>
-        </p:nvSpPr>
-        <p:spPr>
-          <a:xfrm>
-            <a:off x="16494323" y="1809426"/>
-            <a:ext cx="2013058" cy="1006529"/>
-          </a:xfrm>
-          <a:custGeom>
-            <a:avLst/>
-            <a:gdLst/>
-            <a:ahLst/>
-            <a:cxnLst/>
-            <a:rect l="l" t="t" r="r" b="b"/>
-            <a:pathLst>
-              <a:path w="2013058" h="1006529">
-                <a:moveTo>
-                  <a:pt x="0" y="0"/>
-                </a:moveTo>
-                <a:lnTo>
-                  <a:pt x="2013058" y="0"/>
-                </a:lnTo>
-                <a:lnTo>
-                  <a:pt x="2013058" y="1006529"/>
-                </a:lnTo>
-                <a:lnTo>
-                  <a:pt x="0" y="1006529"/>
-                </a:lnTo>
-                <a:lnTo>
-                  <a:pt x="0" y="0"/>
-                </a:lnTo>
-                <a:close/>
-              </a:path>
-            </a:pathLst>
-          </a:custGeom>
-          <a:blipFill>
-            <a:blip r:embed="rId4">
-              <a:extLst>
-                <a:ext uri="{96DAC541-7B7A-43D3-8B79-37D633B846F1}">
-                  <asvg:svgBlip xmlns:asvg="http://schemas.microsoft.com/office/drawing/2016/SVG/main" r:embed="rId5"/>
-                </a:ext>
-              </a:extLst>
-            </a:blip>
-            <a:stretch>
-              <a:fillRect/>
-            </a:stretch>
-          </a:blipFill>
-        </p:spPr>
-      </p:sp>
-      <p:sp>
-        <p:nvSpPr>
-          <p:cNvPr id="14" name="Freeform 14"/>
-          <p:cNvSpPr/>
-          <p:nvPr/>
-        </p:nvSpPr>
-        <p:spPr>
-          <a:xfrm rot="-10800000" flipV="1">
-            <a:off x="16494323" y="2815955"/>
-            <a:ext cx="1006529" cy="1006529"/>
-          </a:xfrm>
-          <a:custGeom>
-            <a:avLst/>
-            <a:gdLst/>
-            <a:ahLst/>
-            <a:cxnLst/>
-            <a:rect l="l" t="t" r="r" b="b"/>
-            <a:pathLst>
-              <a:path w="1006529" h="1006529">
-                <a:moveTo>
-                  <a:pt x="0" y="1006529"/>
-                </a:moveTo>
-                <a:lnTo>
-                  <a:pt x="1006529" y="1006529"/>
-                </a:lnTo>
-                <a:lnTo>
-                  <a:pt x="1006529" y="0"/>
-                </a:lnTo>
-                <a:lnTo>
-                  <a:pt x="0" y="0"/>
-                </a:lnTo>
-                <a:lnTo>
-                  <a:pt x="0" y="1006529"/>
-                </a:lnTo>
-                <a:close/>
-              </a:path>
-            </a:pathLst>
-          </a:custGeom>
-          <a:blipFill>
-            <a:blip r:embed="rId2">
-              <a:extLst>
-                <a:ext uri="{96DAC541-7B7A-43D3-8B79-37D633B846F1}">
-                  <asvg:svgBlip xmlns:asvg="http://schemas.microsoft.com/office/drawing/2016/SVG/main" r:embed="rId3"/>
-                </a:ext>
-              </a:extLst>
-            </a:blip>
-            <a:stretch>
-              <a:fillRect/>
-            </a:stretch>
-          </a:blipFill>
-        </p:spPr>
-      </p:sp>
-      <p:sp>
-        <p:nvSpPr>
-          <p:cNvPr id="15" name="Freeform 15"/>
-          <p:cNvSpPr/>
-          <p:nvPr/>
-        </p:nvSpPr>
-        <p:spPr>
-          <a:xfrm flipV="1">
-            <a:off x="16494323" y="3822484"/>
-            <a:ext cx="2013058" cy="1006529"/>
-          </a:xfrm>
-          <a:custGeom>
-            <a:avLst/>
-            <a:gdLst/>
-            <a:ahLst/>
-            <a:cxnLst/>
-            <a:rect l="l" t="t" r="r" b="b"/>
-            <a:pathLst>
-              <a:path w="2013058" h="1006529">
-                <a:moveTo>
-                  <a:pt x="0" y="1006529"/>
-                </a:moveTo>
-                <a:lnTo>
-                  <a:pt x="2013058" y="1006529"/>
-                </a:lnTo>
-                <a:lnTo>
-                  <a:pt x="2013058" y="0"/>
-                </a:lnTo>
-                <a:lnTo>
-                  <a:pt x="0" y="0"/>
-                </a:lnTo>
-                <a:lnTo>
-                  <a:pt x="0" y="1006529"/>
-                </a:lnTo>
-                <a:close/>
-              </a:path>
-            </a:pathLst>
-          </a:custGeom>
-          <a:blipFill>
-            <a:blip r:embed="rId4">
-              <a:extLst>
-                <a:ext uri="{96DAC541-7B7A-43D3-8B79-37D633B846F1}">
-                  <asvg:svgBlip xmlns:asvg="http://schemas.microsoft.com/office/drawing/2016/SVG/main" r:embed="rId5"/>
-                </a:ext>
-              </a:extLst>
-            </a:blip>
-            <a:stretch>
-              <a:fillRect/>
-            </a:stretch>
-          </a:blipFill>
-        </p:spPr>
-      </p:sp>
-      <p:sp>
-        <p:nvSpPr>
-          <p:cNvPr id="16" name="Freeform 16"/>
-          <p:cNvSpPr/>
-          <p:nvPr/>
-        </p:nvSpPr>
-        <p:spPr>
-          <a:xfrm>
-            <a:off x="1841752" y="8492855"/>
-            <a:ext cx="1006529" cy="1006529"/>
-          </a:xfrm>
-          <a:custGeom>
-            <a:avLst/>
-            <a:gdLst/>
-            <a:ahLst/>
-            <a:cxnLst/>
-            <a:rect l="l" t="t" r="r" b="b"/>
-            <a:pathLst>
-              <a:path w="1006529" h="1006529">
-                <a:moveTo>
-                  <a:pt x="0" y="0"/>
-                </a:moveTo>
-                <a:lnTo>
-                  <a:pt x="1006529" y="0"/>
-                </a:lnTo>
-                <a:lnTo>
-                  <a:pt x="1006529" y="1006529"/>
-                </a:lnTo>
-                <a:lnTo>
-                  <a:pt x="0" y="1006529"/>
-                </a:lnTo>
-                <a:lnTo>
-                  <a:pt x="0" y="0"/>
-                </a:lnTo>
-                <a:close/>
-              </a:path>
-            </a:pathLst>
-          </a:custGeom>
-          <a:blipFill>
-            <a:blip r:embed="rId2">
-              <a:extLst>
-                <a:ext uri="{96DAC541-7B7A-43D3-8B79-37D633B846F1}">
-                  <asvg:svgBlip xmlns:asvg="http://schemas.microsoft.com/office/drawing/2016/SVG/main" r:embed="rId3"/>
-                </a:ext>
-              </a:extLst>
-            </a:blip>
-            <a:stretch>
-              <a:fillRect/>
-            </a:stretch>
-          </a:blipFill>
-        </p:spPr>
-      </p:sp>
-      <p:sp>
-        <p:nvSpPr>
-          <p:cNvPr id="17" name="Freeform 17"/>
-          <p:cNvSpPr/>
-          <p:nvPr/>
-        </p:nvSpPr>
-        <p:spPr>
-          <a:xfrm flipH="1" flipV="1">
-            <a:off x="15487794" y="802897"/>
-            <a:ext cx="1006529" cy="1006529"/>
-          </a:xfrm>
-          <a:custGeom>
-            <a:avLst/>
-            <a:gdLst/>
-            <a:ahLst/>
-            <a:cxnLst/>
-            <a:rect l="l" t="t" r="r" b="b"/>
-            <a:pathLst>
-              <a:path w="1006529" h="1006529">
-                <a:moveTo>
-                  <a:pt x="1006529" y="1006529"/>
-                </a:moveTo>
-                <a:lnTo>
-                  <a:pt x="0" y="1006529"/>
-                </a:lnTo>
-                <a:lnTo>
-                  <a:pt x="0" y="0"/>
-                </a:lnTo>
-                <a:lnTo>
-                  <a:pt x="1006529" y="0"/>
-                </a:lnTo>
-                <a:lnTo>
-                  <a:pt x="1006529" y="1006529"/>
-                </a:lnTo>
-                <a:close/>
-              </a:path>
-            </a:pathLst>
-          </a:custGeom>
-          <a:blipFill>
-            <a:blip r:embed="rId2">
-              <a:extLst>
-                <a:ext uri="{96DAC541-7B7A-43D3-8B79-37D633B846F1}">
-                  <asvg:svgBlip xmlns:asvg="http://schemas.microsoft.com/office/drawing/2016/SVG/main" r:embed="rId3"/>
-                </a:ext>
-              </a:extLst>
-            </a:blip>
-            <a:stretch>
-              <a:fillRect/>
-            </a:stretch>
-          </a:blipFill>
-        </p:spPr>
-      </p:sp>
-      <p:sp>
-        <p:nvSpPr>
-          <p:cNvPr id="18" name="Freeform 18"/>
-          <p:cNvSpPr/>
-          <p:nvPr/>
-        </p:nvSpPr>
-        <p:spPr>
-          <a:xfrm rot="-10800000" flipH="1">
-            <a:off x="1841752" y="7486326"/>
-            <a:ext cx="1006529" cy="1006529"/>
-          </a:xfrm>
-          <a:custGeom>
-            <a:avLst/>
-            <a:gdLst/>
-            <a:ahLst/>
-            <a:cxnLst/>
-            <a:rect l="l" t="t" r="r" b="b"/>
-            <a:pathLst>
-              <a:path w="1006529" h="1006529">
-                <a:moveTo>
-                  <a:pt x="1006529" y="0"/>
-                </a:moveTo>
-                <a:lnTo>
-                  <a:pt x="0" y="0"/>
-                </a:lnTo>
-                <a:lnTo>
-                  <a:pt x="0" y="1006529"/>
-                </a:lnTo>
-                <a:lnTo>
-                  <a:pt x="1006529" y="1006529"/>
-                </a:lnTo>
-                <a:lnTo>
-                  <a:pt x="1006529" y="0"/>
-                </a:lnTo>
-                <a:close/>
-              </a:path>
-            </a:pathLst>
-          </a:custGeom>
-          <a:blipFill>
-            <a:blip r:embed="rId2">
-              <a:extLst>
-                <a:ext uri="{96DAC541-7B7A-43D3-8B79-37D633B846F1}">
-                  <asvg:svgBlip xmlns:asvg="http://schemas.microsoft.com/office/drawing/2016/SVG/main" r:embed="rId3"/>
-                </a:ext>
-              </a:extLst>
-            </a:blip>
-            <a:stretch>
-              <a:fillRect/>
-            </a:stretch>
-          </a:blipFill>
-        </p:spPr>
-      </p:sp>
-      <p:sp>
-        <p:nvSpPr>
-          <p:cNvPr id="19" name="Freeform 19"/>
-          <p:cNvSpPr/>
-          <p:nvPr/>
-        </p:nvSpPr>
-        <p:spPr>
-          <a:xfrm rot="-10800000" flipV="1">
-            <a:off x="15487794" y="1809426"/>
-            <a:ext cx="1006529" cy="1006529"/>
-          </a:xfrm>
-          <a:custGeom>
-            <a:avLst/>
-            <a:gdLst/>
-            <a:ahLst/>
-            <a:cxnLst/>
-            <a:rect l="l" t="t" r="r" b="b"/>
-            <a:pathLst>
-              <a:path w="1006529" h="1006529">
-                <a:moveTo>
-                  <a:pt x="0" y="1006529"/>
-                </a:moveTo>
-                <a:lnTo>
-                  <a:pt x="1006529" y="1006529"/>
-                </a:lnTo>
-                <a:lnTo>
-                  <a:pt x="1006529" y="0"/>
-                </a:lnTo>
-                <a:lnTo>
-                  <a:pt x="0" y="0"/>
-                </a:lnTo>
-                <a:lnTo>
-                  <a:pt x="0" y="1006529"/>
-                </a:lnTo>
-                <a:close/>
-              </a:path>
-            </a:pathLst>
-          </a:custGeom>
-          <a:blipFill>
-            <a:blip r:embed="rId2">
-              <a:extLst>
-                <a:ext uri="{96DAC541-7B7A-43D3-8B79-37D633B846F1}">
-                  <asvg:svgBlip xmlns:asvg="http://schemas.microsoft.com/office/drawing/2016/SVG/main" r:embed="rId3"/>
-                </a:ext>
-              </a:extLst>
-            </a:blip>
-            <a:stretch>
-              <a:fillRect/>
-            </a:stretch>
-          </a:blipFill>
-        </p:spPr>
-      </p:sp>
-      <p:sp>
-        <p:nvSpPr>
-          <p:cNvPr id="20" name="TextBox 20"/>
-          <p:cNvSpPr txBox="1"/>
-          <p:nvPr/>
-        </p:nvSpPr>
-        <p:spPr>
-          <a:xfrm>
-            <a:off x="4564028" y="1802882"/>
-            <a:ext cx="9159943" cy="1790632"/>
-          </a:xfrm>
-          <a:prstGeom prst="rect">
-            <a:avLst/>
-          </a:prstGeom>
-        </p:spPr>
-        <p:txBody>
-          <a:bodyPr lIns="0" tIns="0" rIns="0" bIns="0" rtlCol="0" anchor="t">
-            <a:spAutoFit/>
-          </a:bodyPr>
-          <a:lstStyle/>
-          <a:p>
-            <a:pPr algn="l">
-              <a:lnSpc>
-                <a:spcPts val="10842"/>
-              </a:lnSpc>
-            </a:pPr>
-            <a:r>
-              <a:rPr lang="en-US" sz="13222">
-                <a:solidFill>
-                  <a:srgbClr val="262F43"/>
-                </a:solidFill>
-                <a:latin typeface="Impact"/>
-                <a:ea typeface="Impact"/>
-                <a:cs typeface="Impact"/>
-                <a:sym typeface="Impact"/>
-              </a:rPr>
-              <a:t>CONTENTS</a:t>
-            </a:r>
-          </a:p>
-        </p:txBody>
-      </p:sp>
-      <p:sp>
-        <p:nvSpPr>
-          <p:cNvPr id="21" name="TextBox 21"/>
-          <p:cNvSpPr txBox="1"/>
-          <p:nvPr/>
-        </p:nvSpPr>
-        <p:spPr>
-          <a:xfrm>
-            <a:off x="3989154" y="3204549"/>
-            <a:ext cx="10309692" cy="7036271"/>
-          </a:xfrm>
-          <a:prstGeom prst="rect">
-            <a:avLst/>
-          </a:prstGeom>
-        </p:spPr>
-        <p:txBody>
-          <a:bodyPr lIns="0" tIns="0" rIns="0" bIns="0" rtlCol="0" anchor="t">
-            <a:spAutoFit/>
-          </a:bodyPr>
-          <a:lstStyle/>
-          <a:p>
-            <a:pPr algn="l">
-              <a:lnSpc>
-                <a:spcPts val="4349"/>
-              </a:lnSpc>
-            </a:pPr>
-            <a:r>
-              <a:rPr lang="en-US" sz="3106">
-                <a:solidFill>
-                  <a:srgbClr val="262F43"/>
-                </a:solidFill>
-                <a:latin typeface="Clear Sans"/>
-                <a:ea typeface="Clear Sans"/>
-                <a:cs typeface="Clear Sans"/>
-                <a:sym typeface="Clear Sans"/>
-              </a:rPr>
-              <a:t> 1. Introduction</a:t>
-            </a:r>
-          </a:p>
-          <a:p>
-            <a:pPr algn="l">
-              <a:lnSpc>
-                <a:spcPts val="4349"/>
-              </a:lnSpc>
-            </a:pPr>
-            <a:r>
-              <a:rPr lang="en-US" sz="3106">
-                <a:solidFill>
-                  <a:srgbClr val="262F43"/>
-                </a:solidFill>
-                <a:latin typeface="Clear Sans"/>
-                <a:ea typeface="Clear Sans"/>
-                <a:cs typeface="Clear Sans"/>
-                <a:sym typeface="Clear Sans"/>
-              </a:rPr>
-              <a:t> 2. Limitations of Manual Surveillance</a:t>
-            </a:r>
-          </a:p>
-          <a:p>
-            <a:pPr algn="l">
-              <a:lnSpc>
-                <a:spcPts val="4349"/>
-              </a:lnSpc>
-            </a:pPr>
-            <a:r>
-              <a:rPr lang="en-US" sz="3106">
-                <a:solidFill>
-                  <a:srgbClr val="262F43"/>
-                </a:solidFill>
-                <a:latin typeface="Clear Sans"/>
-                <a:ea typeface="Clear Sans"/>
-                <a:cs typeface="Clear Sans"/>
-                <a:sym typeface="Clear Sans"/>
-              </a:rPr>
-              <a:t> 3. Automation as a Solution</a:t>
-            </a:r>
-          </a:p>
-          <a:p>
-            <a:pPr algn="l">
-              <a:lnSpc>
-                <a:spcPts val="4349"/>
-              </a:lnSpc>
-            </a:pPr>
-            <a:r>
-              <a:rPr lang="en-US" sz="3106">
-                <a:solidFill>
-                  <a:srgbClr val="262F43"/>
-                </a:solidFill>
-                <a:latin typeface="Clear Sans"/>
-                <a:ea typeface="Clear Sans"/>
-                <a:cs typeface="Clear Sans"/>
-                <a:sym typeface="Clear Sans"/>
-              </a:rPr>
-              <a:t> 4. Research Motivation</a:t>
-            </a:r>
-          </a:p>
-          <a:p>
-            <a:pPr algn="l">
-              <a:lnSpc>
-                <a:spcPts val="4349"/>
-              </a:lnSpc>
-            </a:pPr>
-            <a:r>
-              <a:rPr lang="en-US" sz="3106">
-                <a:solidFill>
-                  <a:srgbClr val="262F43"/>
-                </a:solidFill>
-                <a:latin typeface="Clear Sans"/>
-                <a:ea typeface="Clear Sans"/>
-                <a:cs typeface="Clear Sans"/>
-                <a:sym typeface="Clear Sans"/>
-              </a:rPr>
-              <a:t> 5. Problem Statement</a:t>
-            </a:r>
-          </a:p>
-          <a:p>
-            <a:pPr algn="l">
-              <a:lnSpc>
-                <a:spcPts val="4349"/>
-              </a:lnSpc>
-            </a:pPr>
-            <a:r>
-              <a:rPr lang="en-US" sz="3106">
-                <a:solidFill>
-                  <a:srgbClr val="262F43"/>
-                </a:solidFill>
-                <a:latin typeface="Clear Sans"/>
-                <a:ea typeface="Clear Sans"/>
-                <a:cs typeface="Clear Sans"/>
-                <a:sym typeface="Clear Sans"/>
-              </a:rPr>
-              <a:t> 6. Related Work</a:t>
-            </a:r>
-          </a:p>
-          <a:p>
-            <a:pPr algn="l">
-              <a:lnSpc>
-                <a:spcPts val="4349"/>
-              </a:lnSpc>
-            </a:pPr>
-            <a:r>
-              <a:rPr lang="en-US" sz="3106">
-                <a:solidFill>
-                  <a:srgbClr val="262F43"/>
-                </a:solidFill>
-                <a:latin typeface="Clear Sans"/>
-                <a:ea typeface="Clear Sans"/>
-                <a:cs typeface="Clear Sans"/>
-                <a:sym typeface="Clear Sans"/>
-              </a:rPr>
-              <a:t> 7. Proposed System</a:t>
-            </a:r>
-          </a:p>
-          <a:p>
-            <a:pPr algn="l">
-              <a:lnSpc>
-                <a:spcPts val="4349"/>
-              </a:lnSpc>
-            </a:pPr>
-            <a:r>
-              <a:rPr lang="en-US" sz="3106">
-                <a:solidFill>
-                  <a:srgbClr val="262F43"/>
-                </a:solidFill>
-                <a:latin typeface="Clear Sans"/>
-                <a:ea typeface="Clear Sans"/>
-                <a:cs typeface="Clear Sans"/>
-                <a:sym typeface="Clear Sans"/>
-              </a:rPr>
-              <a:t> 8. Architecture of Proposed System</a:t>
-            </a:r>
-          </a:p>
-          <a:p>
-            <a:pPr algn="l">
-              <a:lnSpc>
-                <a:spcPts val="4349"/>
-              </a:lnSpc>
-            </a:pPr>
-            <a:r>
-              <a:rPr lang="en-US" sz="3106">
-                <a:solidFill>
-                  <a:srgbClr val="262F43"/>
-                </a:solidFill>
-                <a:latin typeface="Clear Sans"/>
-                <a:ea typeface="Clear Sans"/>
-                <a:cs typeface="Clear Sans"/>
-                <a:sym typeface="Clear Sans"/>
-              </a:rPr>
-              <a:t> 9. Features Of Proposed System</a:t>
-            </a:r>
-          </a:p>
-          <a:p>
-            <a:pPr algn="l">
-              <a:lnSpc>
-                <a:spcPts val="4349"/>
-              </a:lnSpc>
-            </a:pPr>
-            <a:r>
-              <a:rPr lang="en-US" sz="3106">
-                <a:solidFill>
-                  <a:srgbClr val="262F43"/>
-                </a:solidFill>
-                <a:latin typeface="Clear Sans"/>
-                <a:ea typeface="Clear Sans"/>
-                <a:cs typeface="Clear Sans"/>
-                <a:sym typeface="Clear Sans"/>
-              </a:rPr>
-              <a:t>10.Dataset and Experimental Setup</a:t>
-            </a:r>
-          </a:p>
-          <a:p>
-            <a:pPr algn="l">
-              <a:lnSpc>
-                <a:spcPts val="4349"/>
-              </a:lnSpc>
-            </a:pPr>
-            <a:r>
-              <a:rPr lang="en-US" sz="3106">
-                <a:solidFill>
-                  <a:srgbClr val="262F43"/>
-                </a:solidFill>
-                <a:latin typeface="Clear Sans"/>
-                <a:ea typeface="Clear Sans"/>
-                <a:cs typeface="Clear Sans"/>
-                <a:sym typeface="Clear Sans"/>
-              </a:rPr>
-              <a:t>11.Results</a:t>
-            </a:r>
-          </a:p>
-          <a:p>
-            <a:pPr algn="l">
-              <a:lnSpc>
-                <a:spcPts val="4349"/>
-              </a:lnSpc>
-            </a:pPr>
-            <a:r>
-              <a:rPr lang="en-US" sz="3106">
-                <a:solidFill>
-                  <a:srgbClr val="262F43"/>
-                </a:solidFill>
-                <a:latin typeface="Clear Sans"/>
-                <a:ea typeface="Clear Sans"/>
-                <a:cs typeface="Clear Sans"/>
-                <a:sym typeface="Clear Sans"/>
-              </a:rPr>
-              <a:t>12.Conclusion</a:t>
-            </a:r>
-          </a:p>
-          <a:p>
-            <a:pPr algn="l">
-              <a:lnSpc>
-                <a:spcPts val="4349"/>
-              </a:lnSpc>
-            </a:pPr>
-            <a:r>
-              <a:rPr lang="en-US" sz="3106">
-                <a:solidFill>
-                  <a:srgbClr val="262F43"/>
-                </a:solidFill>
-                <a:latin typeface="Clear Sans"/>
-                <a:ea typeface="Clear Sans"/>
-                <a:cs typeface="Clear Sans"/>
-                <a:sym typeface="Clear Sans"/>
-              </a:rPr>
-              <a:t>13.Future Scope</a:t>
-            </a:r>
-          </a:p>
-        </p:txBody>
-      </p:sp>
-    </p:spTree>
-  </p:cSld>
-  <p:clrMapOvr>
-    <a:masterClrMapping/>
-  </p:clrMapOvr>
-</p:sld>
-</file>
-
-<file path=ppt/slides/slide20.xml><?xml version="1.0" encoding="utf-8"?>
+<file path=ppt/slides/slide21.xml><?xml version="1.0" encoding="utf-8"?>
 <p:sld xmlns:a="http://schemas.openxmlformats.org/drawingml/2006/main" xmlns:r="http://schemas.openxmlformats.org/officeDocument/2006/relationships" xmlns:p="http://schemas.openxmlformats.org/presentationml/2006/main">
   <p:cSld>
     <p:bg>
@@ -20372,7 +21652,7 @@
         </p:nvSpPr>
         <p:spPr>
           <a:xfrm>
-            <a:off x="2172324" y="2131862"/>
+            <a:off x="2517104" y="1067171"/>
             <a:ext cx="13943352" cy="3168934"/>
           </a:xfrm>
           <a:prstGeom prst="rect">
@@ -20391,7 +21671,7 @@
               </a:lnSpc>
             </a:pPr>
             <a:r>
-              <a:rPr lang="en-US" sz="13222">
+              <a:rPr lang="en-US" sz="13222" dirty="0">
                 <a:solidFill>
                   <a:srgbClr val="262F43"/>
                 </a:solidFill>
@@ -21832,7 +23112,7 @@
         </p:nvSpPr>
         <p:spPr>
           <a:xfrm>
-            <a:off x="2172324" y="2131862"/>
+            <a:off x="2172325" y="1840588"/>
             <a:ext cx="13943352" cy="3168934"/>
           </a:xfrm>
           <a:prstGeom prst="rect">
@@ -21851,7 +23131,7 @@
               </a:lnSpc>
             </a:pPr>
             <a:r>
-              <a:rPr lang="en-US" sz="13222">
+              <a:rPr lang="en-US" sz="13222" dirty="0">
                 <a:solidFill>
                   <a:srgbClr val="262F43"/>
                 </a:solidFill>
@@ -23292,7 +24572,7 @@
         </p:nvSpPr>
         <p:spPr>
           <a:xfrm>
-            <a:off x="2104444" y="2328827"/>
+            <a:off x="2104444" y="1415698"/>
             <a:ext cx="14079111" cy="1793983"/>
           </a:xfrm>
           <a:prstGeom prst="rect">
@@ -23311,7 +24591,7 @@
               </a:lnSpc>
             </a:pPr>
             <a:r>
-              <a:rPr lang="en-US" sz="13222">
+              <a:rPr lang="en-US" sz="13222" dirty="0">
                 <a:solidFill>
                   <a:srgbClr val="262F43"/>
                 </a:solidFill>
